--- a/Raytracing Workshop.pptx
+++ b/Raytracing Workshop.pptx
@@ -4,18 +4,24 @@
   <p:sldMasterIdLst>
     <p:sldMasterId id="2147483648" r:id="rId1"/>
   </p:sldMasterIdLst>
+  <p:notesMasterIdLst>
+    <p:notesMasterId r:id="rId16"/>
+  </p:notesMasterIdLst>
   <p:sldIdLst>
     <p:sldId id="256" r:id="rId2"/>
     <p:sldId id="257" r:id="rId3"/>
     <p:sldId id="258" r:id="rId4"/>
     <p:sldId id="263" r:id="rId5"/>
     <p:sldId id="259" r:id="rId6"/>
-    <p:sldId id="260" r:id="rId7"/>
-    <p:sldId id="261" r:id="rId8"/>
-    <p:sldId id="262" r:id="rId9"/>
-    <p:sldId id="264" r:id="rId10"/>
-    <p:sldId id="265" r:id="rId11"/>
-    <p:sldId id="266" r:id="rId12"/>
+    <p:sldId id="267" r:id="rId7"/>
+    <p:sldId id="260" r:id="rId8"/>
+    <p:sldId id="261" r:id="rId9"/>
+    <p:sldId id="262" r:id="rId10"/>
+    <p:sldId id="264" r:id="rId11"/>
+    <p:sldId id="265" r:id="rId12"/>
+    <p:sldId id="266" r:id="rId13"/>
+    <p:sldId id="268" r:id="rId14"/>
+    <p:sldId id="269" r:id="rId15"/>
   </p:sldIdLst>
   <p:sldSz cx="12192000" cy="6858000"/>
   <p:notesSz cx="6858000" cy="9144000"/>
@@ -122,6 +128,1461 @@
 </p:presentation>
 </file>
 
+<file path=ppt/notesMasters/notesMaster1.xml><?xml version="1.0" encoding="utf-8"?>
+<p:notesMaster xmlns:a="http://schemas.openxmlformats.org/drawingml/2006/main" xmlns:r="http://schemas.openxmlformats.org/officeDocument/2006/relationships" xmlns:p="http://schemas.openxmlformats.org/presentationml/2006/main">
+  <p:cSld>
+    <p:bg>
+      <p:bgRef idx="1001">
+        <a:schemeClr val="bg1"/>
+      </p:bgRef>
+    </p:bg>
+    <p:spTree>
+      <p:nvGrpSpPr>
+        <p:cNvPr id="1" name=""/>
+        <p:cNvGrpSpPr/>
+        <p:nvPr/>
+      </p:nvGrpSpPr>
+      <p:grpSpPr>
+        <a:xfrm>
+          <a:off x="0" y="0"/>
+          <a:ext cx="0" cy="0"/>
+          <a:chOff x="0" y="0"/>
+          <a:chExt cx="0" cy="0"/>
+        </a:xfrm>
+      </p:grpSpPr>
+      <p:sp>
+        <p:nvSpPr>
+          <p:cNvPr id="2" name="Header Placeholder 1"/>
+          <p:cNvSpPr>
+            <a:spLocks noGrp="1"/>
+          </p:cNvSpPr>
+          <p:nvPr>
+            <p:ph type="hdr" sz="quarter"/>
+          </p:nvPr>
+        </p:nvSpPr>
+        <p:spPr>
+          <a:xfrm>
+            <a:off x="0" y="0"/>
+            <a:ext cx="2971800" cy="458788"/>
+          </a:xfrm>
+          <a:prstGeom prst="rect">
+            <a:avLst/>
+          </a:prstGeom>
+        </p:spPr>
+        <p:txBody>
+          <a:bodyPr vert="horz" lIns="91440" tIns="45720" rIns="91440" bIns="45720" rtlCol="0"/>
+          <a:lstStyle>
+            <a:lvl1pPr algn="l">
+              <a:defRPr sz="1200"/>
+            </a:lvl1pPr>
+          </a:lstStyle>
+          <a:p>
+            <a:endParaRPr lang="en-US"/>
+          </a:p>
+        </p:txBody>
+      </p:sp>
+      <p:sp>
+        <p:nvSpPr>
+          <p:cNvPr id="3" name="Date Placeholder 2"/>
+          <p:cNvSpPr>
+            <a:spLocks noGrp="1"/>
+          </p:cNvSpPr>
+          <p:nvPr>
+            <p:ph type="dt" idx="1"/>
+          </p:nvPr>
+        </p:nvSpPr>
+        <p:spPr>
+          <a:xfrm>
+            <a:off x="3884613" y="0"/>
+            <a:ext cx="2971800" cy="458788"/>
+          </a:xfrm>
+          <a:prstGeom prst="rect">
+            <a:avLst/>
+          </a:prstGeom>
+        </p:spPr>
+        <p:txBody>
+          <a:bodyPr vert="horz" lIns="91440" tIns="45720" rIns="91440" bIns="45720" rtlCol="0"/>
+          <a:lstStyle>
+            <a:lvl1pPr algn="r">
+              <a:defRPr sz="1200"/>
+            </a:lvl1pPr>
+          </a:lstStyle>
+          <a:p>
+            <a:fld id="{EDA5D7AB-B046-4C69-8468-0E31504931DE}" type="datetimeFigureOut">
+              <a:rPr lang="en-US" smtClean="0"/>
+              <a:t>10/21/2026</a:t>
+            </a:fld>
+            <a:endParaRPr lang="en-US"/>
+          </a:p>
+        </p:txBody>
+      </p:sp>
+      <p:sp>
+        <p:nvSpPr>
+          <p:cNvPr id="4" name="Slide Image Placeholder 3"/>
+          <p:cNvSpPr>
+            <a:spLocks noGrp="1" noRot="1" noChangeAspect="1"/>
+          </p:cNvSpPr>
+          <p:nvPr>
+            <p:ph type="sldImg" idx="2"/>
+          </p:nvPr>
+        </p:nvSpPr>
+        <p:spPr>
+          <a:xfrm>
+            <a:off x="685800" y="1143000"/>
+            <a:ext cx="5486400" cy="3086100"/>
+          </a:xfrm>
+          <a:prstGeom prst="rect">
+            <a:avLst/>
+          </a:prstGeom>
+          <a:noFill/>
+          <a:ln w="12700">
+            <a:solidFill>
+              <a:prstClr val="black"/>
+            </a:solidFill>
+          </a:ln>
+        </p:spPr>
+        <p:txBody>
+          <a:bodyPr vert="horz" lIns="91440" tIns="45720" rIns="91440" bIns="45720" rtlCol="0" anchor="ctr"/>
+          <a:lstStyle/>
+          <a:p>
+            <a:endParaRPr lang="en-US"/>
+          </a:p>
+        </p:txBody>
+      </p:sp>
+      <p:sp>
+        <p:nvSpPr>
+          <p:cNvPr id="5" name="Notes Placeholder 4"/>
+          <p:cNvSpPr>
+            <a:spLocks noGrp="1"/>
+          </p:cNvSpPr>
+          <p:nvPr>
+            <p:ph type="body" sz="quarter" idx="3"/>
+          </p:nvPr>
+        </p:nvSpPr>
+        <p:spPr>
+          <a:xfrm>
+            <a:off x="685800" y="4400550"/>
+            <a:ext cx="5486400" cy="3600450"/>
+          </a:xfrm>
+          <a:prstGeom prst="rect">
+            <a:avLst/>
+          </a:prstGeom>
+        </p:spPr>
+        <p:txBody>
+          <a:bodyPr vert="horz" lIns="91440" tIns="45720" rIns="91440" bIns="45720" rtlCol="0"/>
+          <a:lstStyle/>
+          <a:p>
+            <a:pPr lvl="0"/>
+            <a:r>
+              <a:rPr lang="en-US"/>
+              <a:t>Click to edit Master text styles</a:t>
+            </a:r>
+          </a:p>
+          <a:p>
+            <a:pPr lvl="1"/>
+            <a:r>
+              <a:rPr lang="en-US"/>
+              <a:t>Second level</a:t>
+            </a:r>
+          </a:p>
+          <a:p>
+            <a:pPr lvl="2"/>
+            <a:r>
+              <a:rPr lang="en-US"/>
+              <a:t>Third level</a:t>
+            </a:r>
+          </a:p>
+          <a:p>
+            <a:pPr lvl="3"/>
+            <a:r>
+              <a:rPr lang="en-US"/>
+              <a:t>Fourth level</a:t>
+            </a:r>
+          </a:p>
+          <a:p>
+            <a:pPr lvl="4"/>
+            <a:r>
+              <a:rPr lang="en-US"/>
+              <a:t>Fifth level</a:t>
+            </a:r>
+          </a:p>
+        </p:txBody>
+      </p:sp>
+      <p:sp>
+        <p:nvSpPr>
+          <p:cNvPr id="6" name="Footer Placeholder 5"/>
+          <p:cNvSpPr>
+            <a:spLocks noGrp="1"/>
+          </p:cNvSpPr>
+          <p:nvPr>
+            <p:ph type="ftr" sz="quarter" idx="4"/>
+          </p:nvPr>
+        </p:nvSpPr>
+        <p:spPr>
+          <a:xfrm>
+            <a:off x="0" y="8685213"/>
+            <a:ext cx="2971800" cy="458787"/>
+          </a:xfrm>
+          <a:prstGeom prst="rect">
+            <a:avLst/>
+          </a:prstGeom>
+        </p:spPr>
+        <p:txBody>
+          <a:bodyPr vert="horz" lIns="91440" tIns="45720" rIns="91440" bIns="45720" rtlCol="0" anchor="b"/>
+          <a:lstStyle>
+            <a:lvl1pPr algn="l">
+              <a:defRPr sz="1200"/>
+            </a:lvl1pPr>
+          </a:lstStyle>
+          <a:p>
+            <a:endParaRPr lang="en-US"/>
+          </a:p>
+        </p:txBody>
+      </p:sp>
+      <p:sp>
+        <p:nvSpPr>
+          <p:cNvPr id="7" name="Slide Number Placeholder 6"/>
+          <p:cNvSpPr>
+            <a:spLocks noGrp="1"/>
+          </p:cNvSpPr>
+          <p:nvPr>
+            <p:ph type="sldNum" sz="quarter" idx="5"/>
+          </p:nvPr>
+        </p:nvSpPr>
+        <p:spPr>
+          <a:xfrm>
+            <a:off x="3884613" y="8685213"/>
+            <a:ext cx="2971800" cy="458787"/>
+          </a:xfrm>
+          <a:prstGeom prst="rect">
+            <a:avLst/>
+          </a:prstGeom>
+        </p:spPr>
+        <p:txBody>
+          <a:bodyPr vert="horz" lIns="91440" tIns="45720" rIns="91440" bIns="45720" rtlCol="0" anchor="b"/>
+          <a:lstStyle>
+            <a:lvl1pPr algn="r">
+              <a:defRPr sz="1200"/>
+            </a:lvl1pPr>
+          </a:lstStyle>
+          <a:p>
+            <a:fld id="{7A43C466-EC37-4151-9C60-88A15B00C4B4}" type="slidenum">
+              <a:rPr lang="en-US" smtClean="0"/>
+              <a:t>‹#›</a:t>
+            </a:fld>
+            <a:endParaRPr lang="en-US"/>
+          </a:p>
+        </p:txBody>
+      </p:sp>
+    </p:spTree>
+    <p:extLst>
+      <p:ext uri="{BB962C8B-B14F-4D97-AF65-F5344CB8AC3E}">
+        <p14:creationId xmlns:p14="http://schemas.microsoft.com/office/powerpoint/2010/main" val="372772937"/>
+      </p:ext>
+    </p:extLst>
+  </p:cSld>
+  <p:clrMap bg1="lt1" tx1="dk1" bg2="lt2" tx2="dk2" accent1="accent1" accent2="accent2" accent3="accent3" accent4="accent4" accent5="accent5" accent6="accent6" hlink="hlink" folHlink="folHlink"/>
+  <p:notesStyle>
+    <a:lvl1pPr marL="0" algn="l" defTabSz="914400" rtl="0" eaLnBrk="1" latinLnBrk="0" hangingPunct="1">
+      <a:defRPr sz="1200" kern="1200">
+        <a:solidFill>
+          <a:schemeClr val="tx1"/>
+        </a:solidFill>
+        <a:latin typeface="+mn-lt"/>
+        <a:ea typeface="+mn-ea"/>
+        <a:cs typeface="+mn-cs"/>
+      </a:defRPr>
+    </a:lvl1pPr>
+    <a:lvl2pPr marL="457200" algn="l" defTabSz="914400" rtl="0" eaLnBrk="1" latinLnBrk="0" hangingPunct="1">
+      <a:defRPr sz="1200" kern="1200">
+        <a:solidFill>
+          <a:schemeClr val="tx1"/>
+        </a:solidFill>
+        <a:latin typeface="+mn-lt"/>
+        <a:ea typeface="+mn-ea"/>
+        <a:cs typeface="+mn-cs"/>
+      </a:defRPr>
+    </a:lvl2pPr>
+    <a:lvl3pPr marL="914400" algn="l" defTabSz="914400" rtl="0" eaLnBrk="1" latinLnBrk="0" hangingPunct="1">
+      <a:defRPr sz="1200" kern="1200">
+        <a:solidFill>
+          <a:schemeClr val="tx1"/>
+        </a:solidFill>
+        <a:latin typeface="+mn-lt"/>
+        <a:ea typeface="+mn-ea"/>
+        <a:cs typeface="+mn-cs"/>
+      </a:defRPr>
+    </a:lvl3pPr>
+    <a:lvl4pPr marL="1371600" algn="l" defTabSz="914400" rtl="0" eaLnBrk="1" latinLnBrk="0" hangingPunct="1">
+      <a:defRPr sz="1200" kern="1200">
+        <a:solidFill>
+          <a:schemeClr val="tx1"/>
+        </a:solidFill>
+        <a:latin typeface="+mn-lt"/>
+        <a:ea typeface="+mn-ea"/>
+        <a:cs typeface="+mn-cs"/>
+      </a:defRPr>
+    </a:lvl4pPr>
+    <a:lvl5pPr marL="1828800" algn="l" defTabSz="914400" rtl="0" eaLnBrk="1" latinLnBrk="0" hangingPunct="1">
+      <a:defRPr sz="1200" kern="1200">
+        <a:solidFill>
+          <a:schemeClr val="tx1"/>
+        </a:solidFill>
+        <a:latin typeface="+mn-lt"/>
+        <a:ea typeface="+mn-ea"/>
+        <a:cs typeface="+mn-cs"/>
+      </a:defRPr>
+    </a:lvl5pPr>
+    <a:lvl6pPr marL="2286000" algn="l" defTabSz="914400" rtl="0" eaLnBrk="1" latinLnBrk="0" hangingPunct="1">
+      <a:defRPr sz="1200" kern="1200">
+        <a:solidFill>
+          <a:schemeClr val="tx1"/>
+        </a:solidFill>
+        <a:latin typeface="+mn-lt"/>
+        <a:ea typeface="+mn-ea"/>
+        <a:cs typeface="+mn-cs"/>
+      </a:defRPr>
+    </a:lvl6pPr>
+    <a:lvl7pPr marL="2743200" algn="l" defTabSz="914400" rtl="0" eaLnBrk="1" latinLnBrk="0" hangingPunct="1">
+      <a:defRPr sz="1200" kern="1200">
+        <a:solidFill>
+          <a:schemeClr val="tx1"/>
+        </a:solidFill>
+        <a:latin typeface="+mn-lt"/>
+        <a:ea typeface="+mn-ea"/>
+        <a:cs typeface="+mn-cs"/>
+      </a:defRPr>
+    </a:lvl7pPr>
+    <a:lvl8pPr marL="3200400" algn="l" defTabSz="914400" rtl="0" eaLnBrk="1" latinLnBrk="0" hangingPunct="1">
+      <a:defRPr sz="1200" kern="1200">
+        <a:solidFill>
+          <a:schemeClr val="tx1"/>
+        </a:solidFill>
+        <a:latin typeface="+mn-lt"/>
+        <a:ea typeface="+mn-ea"/>
+        <a:cs typeface="+mn-cs"/>
+      </a:defRPr>
+    </a:lvl8pPr>
+    <a:lvl9pPr marL="3657600" algn="l" defTabSz="914400" rtl="0" eaLnBrk="1" latinLnBrk="0" hangingPunct="1">
+      <a:defRPr sz="1200" kern="1200">
+        <a:solidFill>
+          <a:schemeClr val="tx1"/>
+        </a:solidFill>
+        <a:latin typeface="+mn-lt"/>
+        <a:ea typeface="+mn-ea"/>
+        <a:cs typeface="+mn-cs"/>
+      </a:defRPr>
+    </a:lvl9pPr>
+  </p:notesStyle>
+</p:notesMaster>
+</file>
+
+<file path=ppt/notesSlides/notesSlide1.xml><?xml version="1.0" encoding="utf-8"?>
+<p:notes xmlns:a="http://schemas.openxmlformats.org/drawingml/2006/main" xmlns:r="http://schemas.openxmlformats.org/officeDocument/2006/relationships" xmlns:p="http://schemas.openxmlformats.org/presentationml/2006/main">
+  <p:cSld>
+    <p:spTree>
+      <p:nvGrpSpPr>
+        <p:cNvPr id="1" name=""/>
+        <p:cNvGrpSpPr/>
+        <p:nvPr/>
+      </p:nvGrpSpPr>
+      <p:grpSpPr>
+        <a:xfrm>
+          <a:off x="0" y="0"/>
+          <a:ext cx="0" cy="0"/>
+          <a:chOff x="0" y="0"/>
+          <a:chExt cx="0" cy="0"/>
+        </a:xfrm>
+      </p:grpSpPr>
+      <p:sp>
+        <p:nvSpPr>
+          <p:cNvPr id="2" name="Slide Image Placeholder 1"/>
+          <p:cNvSpPr>
+            <a:spLocks noGrp="1" noRot="1" noChangeAspect="1"/>
+          </p:cNvSpPr>
+          <p:nvPr>
+            <p:ph type="sldImg"/>
+          </p:nvPr>
+        </p:nvSpPr>
+        <p:spPr/>
+      </p:sp>
+      <p:sp>
+        <p:nvSpPr>
+          <p:cNvPr id="3" name="Notes Placeholder 2"/>
+          <p:cNvSpPr>
+            <a:spLocks noGrp="1"/>
+          </p:cNvSpPr>
+          <p:nvPr>
+            <p:ph type="body" idx="1"/>
+          </p:nvPr>
+        </p:nvSpPr>
+        <p:spPr/>
+        <p:txBody>
+          <a:bodyPr/>
+          <a:lstStyle/>
+          <a:p>
+            <a:r>
+              <a:rPr lang="en-US" dirty="0"/>
+              <a:t>3 main rendering methods</a:t>
+            </a:r>
+          </a:p>
+          <a:p>
+            <a:endParaRPr lang="en-US" dirty="0"/>
+          </a:p>
+          <a:p>
+            <a:r>
+              <a:rPr lang="en-US" dirty="0"/>
+              <a:t>Rasterization</a:t>
+            </a:r>
+          </a:p>
+          <a:p>
+            <a:pPr marL="171450" indent="-171450">
+              <a:buFont typeface="Arial" panose="020B0604020202020204" pitchFamily="34" charset="0"/>
+              <a:buChar char="•"/>
+            </a:pPr>
+            <a:r>
+              <a:rPr lang="en-US" dirty="0"/>
+              <a:t>went over this in the shader workshop</a:t>
+            </a:r>
+          </a:p>
+          <a:p>
+            <a:pPr marL="171450" indent="-171450">
+              <a:buFont typeface="Arial" panose="020B0604020202020204" pitchFamily="34" charset="0"/>
+              <a:buChar char="•"/>
+            </a:pPr>
+            <a:r>
+              <a:rPr lang="en-US" dirty="0"/>
+              <a:t>Very fast, but effects/realism is hard</a:t>
+            </a:r>
+          </a:p>
+          <a:p>
+            <a:pPr marL="171450" indent="-171450">
+              <a:buFont typeface="Arial" panose="020B0604020202020204" pitchFamily="34" charset="0"/>
+              <a:buChar char="•"/>
+            </a:pPr>
+            <a:r>
+              <a:rPr lang="en-US" dirty="0"/>
+              <a:t>Special hardware in GPUs</a:t>
+            </a:r>
+          </a:p>
+          <a:p>
+            <a:pPr marL="0" indent="0">
+              <a:buFont typeface="Arial" panose="020B0604020202020204" pitchFamily="34" charset="0"/>
+              <a:buNone/>
+            </a:pPr>
+            <a:endParaRPr lang="en-US" dirty="0"/>
+          </a:p>
+          <a:p>
+            <a:pPr marL="0" indent="0">
+              <a:buFont typeface="Arial" panose="020B0604020202020204" pitchFamily="34" charset="0"/>
+              <a:buNone/>
+            </a:pPr>
+            <a:r>
+              <a:rPr lang="en-US" dirty="0"/>
+              <a:t>Ray Marching</a:t>
+            </a:r>
+          </a:p>
+          <a:p>
+            <a:pPr marL="171450" indent="-171450">
+              <a:buFont typeface="Arial" panose="020B0604020202020204" pitchFamily="34" charset="0"/>
+              <a:buChar char="•"/>
+            </a:pPr>
+            <a:r>
+              <a:rPr lang="en-US" dirty="0"/>
+              <a:t>Somewhat recent technique</a:t>
+            </a:r>
+          </a:p>
+          <a:p>
+            <a:pPr marL="171450" indent="-171450">
+              <a:buFont typeface="Arial" panose="020B0604020202020204" pitchFamily="34" charset="0"/>
+              <a:buChar char="•"/>
+            </a:pPr>
+            <a:r>
+              <a:rPr lang="en-US" dirty="0"/>
+              <a:t>Relies on a function that calculates the distance from any objects</a:t>
+            </a:r>
+          </a:p>
+          <a:p>
+            <a:pPr marL="171450" indent="-171450">
+              <a:buFont typeface="Arial" panose="020B0604020202020204" pitchFamily="34" charset="0"/>
+              <a:buChar char="•"/>
+            </a:pPr>
+            <a:r>
+              <a:rPr lang="en-US" dirty="0"/>
+              <a:t>Marches the ray by that distance</a:t>
+            </a:r>
+          </a:p>
+          <a:p>
+            <a:pPr marL="171450" indent="-171450">
+              <a:buFont typeface="Arial" panose="020B0604020202020204" pitchFamily="34" charset="0"/>
+              <a:buChar char="•"/>
+            </a:pPr>
+            <a:r>
+              <a:rPr lang="en-US" dirty="0"/>
+              <a:t>Useful for rendering analytical objects</a:t>
+            </a:r>
+          </a:p>
+          <a:p>
+            <a:pPr marL="171450" indent="-171450">
+              <a:buFont typeface="Arial" panose="020B0604020202020204" pitchFamily="34" charset="0"/>
+              <a:buChar char="•"/>
+            </a:pPr>
+            <a:r>
+              <a:rPr lang="en-US" dirty="0"/>
+              <a:t>Many effects easily implemented</a:t>
+            </a:r>
+          </a:p>
+          <a:p>
+            <a:pPr marL="0" indent="0">
+              <a:buFont typeface="Arial" panose="020B0604020202020204" pitchFamily="34" charset="0"/>
+              <a:buNone/>
+            </a:pPr>
+            <a:endParaRPr lang="en-US" dirty="0"/>
+          </a:p>
+          <a:p>
+            <a:pPr marL="0" indent="0">
+              <a:buFont typeface="Arial" panose="020B0604020202020204" pitchFamily="34" charset="0"/>
+              <a:buNone/>
+            </a:pPr>
+            <a:r>
+              <a:rPr lang="en-US" dirty="0"/>
+              <a:t>Ray Tracing</a:t>
+            </a:r>
+          </a:p>
+          <a:p>
+            <a:pPr marL="171450" indent="-171450">
+              <a:buFont typeface="Arial" panose="020B0604020202020204" pitchFamily="34" charset="0"/>
+              <a:buChar char="•"/>
+            </a:pPr>
+            <a:r>
+              <a:rPr lang="en-US" dirty="0"/>
+              <a:t>The topic of this workshop</a:t>
+            </a:r>
+          </a:p>
+          <a:p>
+            <a:pPr marL="171450" indent="-171450">
+              <a:buFont typeface="Arial" panose="020B0604020202020204" pitchFamily="34" charset="0"/>
+              <a:buChar char="•"/>
+            </a:pPr>
+            <a:r>
+              <a:rPr lang="en-US" dirty="0"/>
+              <a:t>Path Tracing is another term you might hear. We are technically building a Path Tracer. The best explanation I could find is that Path Tracing is a subset of Ray Tracing where you send much more rays.</a:t>
+            </a:r>
+          </a:p>
+          <a:p>
+            <a:pPr marL="171450" indent="-171450">
+              <a:buFont typeface="Arial" panose="020B0604020202020204" pitchFamily="34" charset="0"/>
+              <a:buChar char="•"/>
+            </a:pPr>
+            <a:r>
+              <a:rPr lang="en-US" dirty="0"/>
+              <a:t>Simulate light by sending individual photons bouncing through the scene</a:t>
+            </a:r>
+          </a:p>
+          <a:p>
+            <a:pPr marL="171450" indent="-171450">
+              <a:buFont typeface="Arial" panose="020B0604020202020204" pitchFamily="34" charset="0"/>
+              <a:buChar char="•"/>
+            </a:pPr>
+            <a:r>
+              <a:rPr lang="en-US" dirty="0"/>
+              <a:t>All lighting and effects for free</a:t>
+            </a:r>
+          </a:p>
+          <a:p>
+            <a:pPr marL="171450" indent="-171450">
+              <a:buFont typeface="Arial" panose="020B0604020202020204" pitchFamily="34" charset="0"/>
+              <a:buChar char="•"/>
+            </a:pPr>
+            <a:r>
+              <a:rPr lang="en-US" dirty="0"/>
+              <a:t>Most accurate to real life</a:t>
+            </a:r>
+          </a:p>
+        </p:txBody>
+      </p:sp>
+      <p:sp>
+        <p:nvSpPr>
+          <p:cNvPr id="4" name="Slide Number Placeholder 3"/>
+          <p:cNvSpPr>
+            <a:spLocks noGrp="1"/>
+          </p:cNvSpPr>
+          <p:nvPr>
+            <p:ph type="sldNum" sz="quarter" idx="5"/>
+          </p:nvPr>
+        </p:nvSpPr>
+        <p:spPr/>
+        <p:txBody>
+          <a:bodyPr/>
+          <a:lstStyle/>
+          <a:p>
+            <a:fld id="{7A43C466-EC37-4151-9C60-88A15B00C4B4}" type="slidenum">
+              <a:rPr lang="en-US" smtClean="0"/>
+              <a:t>2</a:t>
+            </a:fld>
+            <a:endParaRPr lang="en-US"/>
+          </a:p>
+        </p:txBody>
+      </p:sp>
+    </p:spTree>
+    <p:extLst>
+      <p:ext uri="{BB962C8B-B14F-4D97-AF65-F5344CB8AC3E}">
+        <p14:creationId xmlns:p14="http://schemas.microsoft.com/office/powerpoint/2010/main" val="389767349"/>
+      </p:ext>
+    </p:extLst>
+  </p:cSld>
+  <p:clrMapOvr>
+    <a:masterClrMapping/>
+  </p:clrMapOvr>
+</p:notes>
+</file>
+
+<file path=ppt/notesSlides/notesSlide2.xml><?xml version="1.0" encoding="utf-8"?>
+<p:notes xmlns:a="http://schemas.openxmlformats.org/drawingml/2006/main" xmlns:r="http://schemas.openxmlformats.org/officeDocument/2006/relationships" xmlns:p="http://schemas.openxmlformats.org/presentationml/2006/main">
+  <p:cSld>
+    <p:spTree>
+      <p:nvGrpSpPr>
+        <p:cNvPr id="1" name=""/>
+        <p:cNvGrpSpPr/>
+        <p:nvPr/>
+      </p:nvGrpSpPr>
+      <p:grpSpPr>
+        <a:xfrm>
+          <a:off x="0" y="0"/>
+          <a:ext cx="0" cy="0"/>
+          <a:chOff x="0" y="0"/>
+          <a:chExt cx="0" cy="0"/>
+        </a:xfrm>
+      </p:grpSpPr>
+      <p:sp>
+        <p:nvSpPr>
+          <p:cNvPr id="2" name="Slide Image Placeholder 1"/>
+          <p:cNvSpPr>
+            <a:spLocks noGrp="1" noRot="1" noChangeAspect="1"/>
+          </p:cNvSpPr>
+          <p:nvPr>
+            <p:ph type="sldImg"/>
+          </p:nvPr>
+        </p:nvSpPr>
+        <p:spPr/>
+      </p:sp>
+      <p:sp>
+        <p:nvSpPr>
+          <p:cNvPr id="3" name="Notes Placeholder 2"/>
+          <p:cNvSpPr>
+            <a:spLocks noGrp="1"/>
+          </p:cNvSpPr>
+          <p:nvPr>
+            <p:ph type="body" idx="1"/>
+          </p:nvPr>
+        </p:nvSpPr>
+        <p:spPr/>
+        <p:txBody>
+          <a:bodyPr/>
+          <a:lstStyle/>
+          <a:p>
+            <a:r>
+              <a:rPr lang="en-US" dirty="0"/>
+              <a:t>Each individual photon leaving light sources is modeled as a ray</a:t>
+            </a:r>
+          </a:p>
+          <a:p>
+            <a:r>
+              <a:rPr lang="en-US" dirty="0"/>
+              <a:t>Rays have an origin and a direction and can only move forward</a:t>
+            </a:r>
+          </a:p>
+          <a:p>
+            <a:r>
+              <a:rPr lang="en-US" dirty="0"/>
+              <a:t>Each light source has a color and an intensity</a:t>
+            </a:r>
+          </a:p>
+          <a:p>
+            <a:r>
+              <a:rPr lang="en-US" dirty="0"/>
+              <a:t>Rays leave the light source with the light source’s color and intensity</a:t>
+            </a:r>
+          </a:p>
+          <a:p>
+            <a:r>
+              <a:rPr lang="en-US" dirty="0"/>
+              <a:t>When a ray hits an object, the object absorbs some of the light (different frequencies of light)</a:t>
+            </a:r>
+          </a:p>
+          <a:p>
+            <a:r>
+              <a:rPr lang="en-US" dirty="0"/>
+              <a:t>For example, this ray would have a green color</a:t>
+            </a:r>
+          </a:p>
+          <a:p>
+            <a:r>
+              <a:rPr lang="en-US" dirty="0"/>
+              <a:t>Eventually some rays will hit the camera sensor</a:t>
+            </a:r>
+          </a:p>
+          <a:p>
+            <a:r>
+              <a:rPr lang="en-US" dirty="0"/>
+              <a:t>We record where it hit the camera sensor and update the pixel in the image at that location</a:t>
+            </a:r>
+          </a:p>
+          <a:p>
+            <a:r>
+              <a:rPr lang="en-US" dirty="0"/>
+              <a:t>DRAW ON BOARD SENSOR FROM BOTH ANGLES</a:t>
+            </a:r>
+          </a:p>
+          <a:p>
+            <a:r>
+              <a:rPr lang="en-US" dirty="0"/>
+              <a:t>To avoid a grainy image, we send many rays</a:t>
+            </a:r>
+          </a:p>
+        </p:txBody>
+      </p:sp>
+      <p:sp>
+        <p:nvSpPr>
+          <p:cNvPr id="4" name="Slide Number Placeholder 3"/>
+          <p:cNvSpPr>
+            <a:spLocks noGrp="1"/>
+          </p:cNvSpPr>
+          <p:nvPr>
+            <p:ph type="sldNum" sz="quarter" idx="5"/>
+          </p:nvPr>
+        </p:nvSpPr>
+        <p:spPr/>
+        <p:txBody>
+          <a:bodyPr/>
+          <a:lstStyle/>
+          <a:p>
+            <a:fld id="{7A43C466-EC37-4151-9C60-88A15B00C4B4}" type="slidenum">
+              <a:rPr lang="en-US" smtClean="0"/>
+              <a:t>3</a:t>
+            </a:fld>
+            <a:endParaRPr lang="en-US"/>
+          </a:p>
+        </p:txBody>
+      </p:sp>
+    </p:spTree>
+    <p:extLst>
+      <p:ext uri="{BB962C8B-B14F-4D97-AF65-F5344CB8AC3E}">
+        <p14:creationId xmlns:p14="http://schemas.microsoft.com/office/powerpoint/2010/main" val="1718901211"/>
+      </p:ext>
+    </p:extLst>
+  </p:cSld>
+  <p:clrMapOvr>
+    <a:masterClrMapping/>
+  </p:clrMapOvr>
+</p:notes>
+</file>
+
+<file path=ppt/notesSlides/notesSlide3.xml><?xml version="1.0" encoding="utf-8"?>
+<p:notes xmlns:a="http://schemas.openxmlformats.org/drawingml/2006/main" xmlns:r="http://schemas.openxmlformats.org/officeDocument/2006/relationships" xmlns:p="http://schemas.openxmlformats.org/presentationml/2006/main">
+  <p:cSld>
+    <p:spTree>
+      <p:nvGrpSpPr>
+        <p:cNvPr id="1" name=""/>
+        <p:cNvGrpSpPr/>
+        <p:nvPr/>
+      </p:nvGrpSpPr>
+      <p:grpSpPr>
+        <a:xfrm>
+          <a:off x="0" y="0"/>
+          <a:ext cx="0" cy="0"/>
+          <a:chOff x="0" y="0"/>
+          <a:chExt cx="0" cy="0"/>
+        </a:xfrm>
+      </p:grpSpPr>
+      <p:sp>
+        <p:nvSpPr>
+          <p:cNvPr id="2" name="Slide Image Placeholder 1"/>
+          <p:cNvSpPr>
+            <a:spLocks noGrp="1" noRot="1" noChangeAspect="1"/>
+          </p:cNvSpPr>
+          <p:nvPr>
+            <p:ph type="sldImg"/>
+          </p:nvPr>
+        </p:nvSpPr>
+        <p:spPr/>
+      </p:sp>
+      <p:sp>
+        <p:nvSpPr>
+          <p:cNvPr id="3" name="Notes Placeholder 2"/>
+          <p:cNvSpPr>
+            <a:spLocks noGrp="1"/>
+          </p:cNvSpPr>
+          <p:nvPr>
+            <p:ph type="body" idx="1"/>
+          </p:nvPr>
+        </p:nvSpPr>
+        <p:spPr/>
+        <p:txBody>
+          <a:bodyPr/>
+          <a:lstStyle/>
+          <a:p>
+            <a:r>
+              <a:rPr lang="en-US" dirty="0"/>
+              <a:t>Points are capitalized and directions/vectors are lowercase and have an arrow on top.</a:t>
+            </a:r>
+          </a:p>
+          <a:p>
+            <a:r>
+              <a:rPr lang="en-US" dirty="0"/>
+              <a:t>T must always be positive</a:t>
+            </a:r>
+          </a:p>
+          <a:p>
+            <a:r>
+              <a:rPr lang="en-US" dirty="0"/>
+              <a:t>Direction is usually normalized to have a length of one</a:t>
+            </a:r>
+          </a:p>
+        </p:txBody>
+      </p:sp>
+      <p:sp>
+        <p:nvSpPr>
+          <p:cNvPr id="4" name="Slide Number Placeholder 3"/>
+          <p:cNvSpPr>
+            <a:spLocks noGrp="1"/>
+          </p:cNvSpPr>
+          <p:nvPr>
+            <p:ph type="sldNum" sz="quarter" idx="5"/>
+          </p:nvPr>
+        </p:nvSpPr>
+        <p:spPr/>
+        <p:txBody>
+          <a:bodyPr/>
+          <a:lstStyle/>
+          <a:p>
+            <a:fld id="{7A43C466-EC37-4151-9C60-88A15B00C4B4}" type="slidenum">
+              <a:rPr lang="en-US" smtClean="0"/>
+              <a:t>4</a:t>
+            </a:fld>
+            <a:endParaRPr lang="en-US"/>
+          </a:p>
+        </p:txBody>
+      </p:sp>
+    </p:spTree>
+    <p:extLst>
+      <p:ext uri="{BB962C8B-B14F-4D97-AF65-F5344CB8AC3E}">
+        <p14:creationId xmlns:p14="http://schemas.microsoft.com/office/powerpoint/2010/main" val="3890005555"/>
+      </p:ext>
+    </p:extLst>
+  </p:cSld>
+  <p:clrMapOvr>
+    <a:masterClrMapping/>
+  </p:clrMapOvr>
+</p:notes>
+</file>
+
+<file path=ppt/notesSlides/notesSlide4.xml><?xml version="1.0" encoding="utf-8"?>
+<p:notes xmlns:a="http://schemas.openxmlformats.org/drawingml/2006/main" xmlns:r="http://schemas.openxmlformats.org/officeDocument/2006/relationships" xmlns:p="http://schemas.openxmlformats.org/presentationml/2006/main">
+  <p:cSld>
+    <p:spTree>
+      <p:nvGrpSpPr>
+        <p:cNvPr id="1" name=""/>
+        <p:cNvGrpSpPr/>
+        <p:nvPr/>
+      </p:nvGrpSpPr>
+      <p:grpSpPr>
+        <a:xfrm>
+          <a:off x="0" y="0"/>
+          <a:ext cx="0" cy="0"/>
+          <a:chOff x="0" y="0"/>
+          <a:chExt cx="0" cy="0"/>
+        </a:xfrm>
+      </p:grpSpPr>
+      <p:sp>
+        <p:nvSpPr>
+          <p:cNvPr id="2" name="Slide Image Placeholder 1"/>
+          <p:cNvSpPr>
+            <a:spLocks noGrp="1" noRot="1" noChangeAspect="1"/>
+          </p:cNvSpPr>
+          <p:nvPr>
+            <p:ph type="sldImg"/>
+          </p:nvPr>
+        </p:nvSpPr>
+        <p:spPr/>
+      </p:sp>
+      <p:sp>
+        <p:nvSpPr>
+          <p:cNvPr id="3" name="Notes Placeholder 2"/>
+          <p:cNvSpPr>
+            <a:spLocks noGrp="1"/>
+          </p:cNvSpPr>
+          <p:nvPr>
+            <p:ph type="body" idx="1"/>
+          </p:nvPr>
+        </p:nvSpPr>
+        <p:spPr/>
+        <p:txBody>
+          <a:bodyPr/>
+          <a:lstStyle/>
+          <a:p>
+            <a:r>
+              <a:rPr lang="en-US" dirty="0"/>
+              <a:t>In the earlier model, rays collected light by bouncing off objects. In the real world, different objects reflect different wavelengths of light differently.</a:t>
+            </a:r>
+          </a:p>
+          <a:p>
+            <a:r>
+              <a:rPr lang="en-US" dirty="0"/>
+              <a:t>A red object would reflect red light and absorb the other kinds of light.</a:t>
+            </a:r>
+          </a:p>
+          <a:p>
+            <a:r>
+              <a:rPr lang="en-US" dirty="0"/>
+              <a:t>We can approximate this by representing light as a combination of red, green, and blue components.</a:t>
+            </a:r>
+          </a:p>
+          <a:p>
+            <a:r>
+              <a:rPr lang="en-US" dirty="0"/>
+              <a:t>Instead of using RGB integer values from 0-255, we use decimal values between 0-1*</a:t>
+            </a:r>
+          </a:p>
+          <a:p>
+            <a:r>
+              <a:rPr lang="en-US" dirty="0"/>
+              <a:t>This approximation works because our eyes have parts that react to red-</a:t>
+            </a:r>
+            <a:r>
+              <a:rPr lang="en-US" dirty="0" err="1"/>
+              <a:t>ish</a:t>
+            </a:r>
+            <a:r>
+              <a:rPr lang="en-US" dirty="0"/>
+              <a:t> light, green-</a:t>
+            </a:r>
+            <a:r>
+              <a:rPr lang="en-US" dirty="0" err="1"/>
+              <a:t>ish</a:t>
+            </a:r>
+            <a:r>
+              <a:rPr lang="en-US" dirty="0"/>
+              <a:t> light, and blue-</a:t>
+            </a:r>
+            <a:r>
+              <a:rPr lang="en-US" dirty="0" err="1"/>
+              <a:t>ish</a:t>
+            </a:r>
+            <a:r>
+              <a:rPr lang="en-US" dirty="0"/>
+              <a:t> light</a:t>
+            </a:r>
+          </a:p>
+          <a:p>
+            <a:r>
+              <a:rPr lang="en-US" dirty="0"/>
+              <a:t>We can approximate light reflecting off a surface by multiplying the light by the color of the surface.</a:t>
+            </a:r>
+          </a:p>
+          <a:p>
+            <a:endParaRPr lang="en-US" dirty="0"/>
+          </a:p>
+          <a:p>
+            <a:r>
+              <a:rPr lang="en-US" dirty="0"/>
+              <a:t>As a light ray bounces through the scene, it is multiplied some number of times, then hits the camera</a:t>
+            </a:r>
+          </a:p>
+          <a:p>
+            <a:r>
+              <a:rPr lang="en-US" dirty="0"/>
+              <a:t>Multiplication is communitive, so we can do everything in reverse</a:t>
+            </a:r>
+          </a:p>
+          <a:p>
+            <a:r>
+              <a:rPr lang="en-US" dirty="0"/>
+              <a:t>Start at the camera and bounce through the scene</a:t>
+            </a:r>
+          </a:p>
+          <a:p>
+            <a:r>
+              <a:rPr lang="en-US" dirty="0"/>
+              <a:t>Eventually hits a light source</a:t>
+            </a:r>
+          </a:p>
+          <a:p>
+            <a:r>
+              <a:rPr lang="en-US" dirty="0"/>
+              <a:t>Multiply the light and intensity of the light</a:t>
+            </a:r>
+          </a:p>
+          <a:p>
+            <a:r>
+              <a:rPr lang="en-US" dirty="0"/>
+              <a:t>TALK ABOUT INTENSITY</a:t>
+            </a:r>
+          </a:p>
+          <a:p>
+            <a:r>
+              <a:rPr lang="en-US" dirty="0"/>
+              <a:t>Record the final value for the pixel.</a:t>
+            </a:r>
+          </a:p>
+          <a:p>
+            <a:endParaRPr lang="en-US" dirty="0"/>
+          </a:p>
+        </p:txBody>
+      </p:sp>
+      <p:sp>
+        <p:nvSpPr>
+          <p:cNvPr id="4" name="Slide Number Placeholder 3"/>
+          <p:cNvSpPr>
+            <a:spLocks noGrp="1"/>
+          </p:cNvSpPr>
+          <p:nvPr>
+            <p:ph type="sldNum" sz="quarter" idx="5"/>
+          </p:nvPr>
+        </p:nvSpPr>
+        <p:spPr/>
+        <p:txBody>
+          <a:bodyPr/>
+          <a:lstStyle/>
+          <a:p>
+            <a:fld id="{7A43C466-EC37-4151-9C60-88A15B00C4B4}" type="slidenum">
+              <a:rPr lang="en-US" smtClean="0"/>
+              <a:t>5</a:t>
+            </a:fld>
+            <a:endParaRPr lang="en-US"/>
+          </a:p>
+        </p:txBody>
+      </p:sp>
+    </p:spTree>
+    <p:extLst>
+      <p:ext uri="{BB962C8B-B14F-4D97-AF65-F5344CB8AC3E}">
+        <p14:creationId xmlns:p14="http://schemas.microsoft.com/office/powerpoint/2010/main" val="1095552681"/>
+      </p:ext>
+    </p:extLst>
+  </p:cSld>
+  <p:clrMapOvr>
+    <a:masterClrMapping/>
+  </p:clrMapOvr>
+</p:notes>
+</file>
+
+<file path=ppt/notesSlides/notesSlide5.xml><?xml version="1.0" encoding="utf-8"?>
+<p:notes xmlns:a="http://schemas.openxmlformats.org/drawingml/2006/main" xmlns:r="http://schemas.openxmlformats.org/officeDocument/2006/relationships" xmlns:p="http://schemas.openxmlformats.org/presentationml/2006/main">
+  <p:cSld>
+    <p:spTree>
+      <p:nvGrpSpPr>
+        <p:cNvPr id="1" name=""/>
+        <p:cNvGrpSpPr/>
+        <p:nvPr/>
+      </p:nvGrpSpPr>
+      <p:grpSpPr>
+        <a:xfrm>
+          <a:off x="0" y="0"/>
+          <a:ext cx="0" cy="0"/>
+          <a:chOff x="0" y="0"/>
+          <a:chExt cx="0" cy="0"/>
+        </a:xfrm>
+      </p:grpSpPr>
+      <p:sp>
+        <p:nvSpPr>
+          <p:cNvPr id="2" name="Slide Image Placeholder 1"/>
+          <p:cNvSpPr>
+            <a:spLocks noGrp="1" noRot="1" noChangeAspect="1"/>
+          </p:cNvSpPr>
+          <p:nvPr>
+            <p:ph type="sldImg"/>
+          </p:nvPr>
+        </p:nvSpPr>
+        <p:spPr/>
+      </p:sp>
+      <p:sp>
+        <p:nvSpPr>
+          <p:cNvPr id="3" name="Notes Placeholder 2"/>
+          <p:cNvSpPr>
+            <a:spLocks noGrp="1"/>
+          </p:cNvSpPr>
+          <p:nvPr>
+            <p:ph type="body" idx="1"/>
+          </p:nvPr>
+        </p:nvSpPr>
+        <p:spPr/>
+        <p:txBody>
+          <a:bodyPr/>
+          <a:lstStyle/>
+          <a:p>
+            <a:r>
+              <a:rPr lang="en-US" dirty="0"/>
+              <a:t>I glossed over how we send the light rays from the camera into the scene</a:t>
+            </a:r>
+          </a:p>
+          <a:p>
+            <a:r>
+              <a:rPr lang="en-US" dirty="0"/>
+              <a:t>If we chose a random direction for each pixel, each pixel would become the average color of the entire scene</a:t>
+            </a:r>
+          </a:p>
+          <a:p>
+            <a:r>
+              <a:rPr lang="en-US" dirty="0"/>
+              <a:t>Real world cameras use lenses for this purpose</a:t>
+            </a:r>
+          </a:p>
+          <a:p>
+            <a:r>
+              <a:rPr lang="en-US" dirty="0"/>
+              <a:t>We can approximate how our eyes perceive light using a pinhole</a:t>
+            </a:r>
+          </a:p>
+          <a:p>
+            <a:r>
+              <a:rPr lang="en-US" dirty="0"/>
+              <a:t>Each pixel only allows light from ONE specific angle</a:t>
+            </a:r>
+          </a:p>
+          <a:p>
+            <a:r>
+              <a:rPr lang="en-US" dirty="0"/>
+              <a:t>Which means we only need to send pixels in one specific angle per pixel</a:t>
+            </a:r>
+          </a:p>
+          <a:p>
+            <a:endParaRPr lang="en-US" dirty="0"/>
+          </a:p>
+          <a:p>
+            <a:r>
+              <a:rPr lang="en-US" dirty="0"/>
+              <a:t>Treat the pinhole as the camera center</a:t>
+            </a:r>
+          </a:p>
+          <a:p>
+            <a:endParaRPr lang="en-US" dirty="0"/>
+          </a:p>
+          <a:p>
+            <a:r>
+              <a:rPr lang="en-US" dirty="0"/>
+              <a:t>Imagine the grid of pixels of the image in front of the camera</a:t>
+            </a:r>
+          </a:p>
+          <a:p>
+            <a:r>
+              <a:rPr lang="en-US" dirty="0"/>
+              <a:t>The ray for each pixel leaves from the camera’s center and travels through its pixel in the screen also called the viewport</a:t>
+            </a:r>
+          </a:p>
+          <a:p>
+            <a:r>
+              <a:rPr lang="en-US" dirty="0"/>
+              <a:t>The distance between the camera and the viewport is called the focal length</a:t>
+            </a:r>
+          </a:p>
+          <a:p>
+            <a:endParaRPr lang="en-US" dirty="0"/>
+          </a:p>
+        </p:txBody>
+      </p:sp>
+      <p:sp>
+        <p:nvSpPr>
+          <p:cNvPr id="4" name="Slide Number Placeholder 3"/>
+          <p:cNvSpPr>
+            <a:spLocks noGrp="1"/>
+          </p:cNvSpPr>
+          <p:nvPr>
+            <p:ph type="sldNum" sz="quarter" idx="5"/>
+          </p:nvPr>
+        </p:nvSpPr>
+        <p:spPr/>
+        <p:txBody>
+          <a:bodyPr/>
+          <a:lstStyle/>
+          <a:p>
+            <a:fld id="{7A43C466-EC37-4151-9C60-88A15B00C4B4}" type="slidenum">
+              <a:rPr lang="en-US" smtClean="0"/>
+              <a:t>6</a:t>
+            </a:fld>
+            <a:endParaRPr lang="en-US"/>
+          </a:p>
+        </p:txBody>
+      </p:sp>
+    </p:spTree>
+    <p:extLst>
+      <p:ext uri="{BB962C8B-B14F-4D97-AF65-F5344CB8AC3E}">
+        <p14:creationId xmlns:p14="http://schemas.microsoft.com/office/powerpoint/2010/main" val="2296592840"/>
+      </p:ext>
+    </p:extLst>
+  </p:cSld>
+  <p:clrMapOvr>
+    <a:masterClrMapping/>
+  </p:clrMapOvr>
+</p:notes>
+</file>
+
+<file path=ppt/notesSlides/notesSlide6.xml><?xml version="1.0" encoding="utf-8"?>
+<p:notes xmlns:a="http://schemas.openxmlformats.org/drawingml/2006/main" xmlns:r="http://schemas.openxmlformats.org/officeDocument/2006/relationships" xmlns:p="http://schemas.openxmlformats.org/presentationml/2006/main">
+  <p:cSld>
+    <p:spTree>
+      <p:nvGrpSpPr>
+        <p:cNvPr id="1" name=""/>
+        <p:cNvGrpSpPr/>
+        <p:nvPr/>
+      </p:nvGrpSpPr>
+      <p:grpSpPr>
+        <a:xfrm>
+          <a:off x="0" y="0"/>
+          <a:ext cx="0" cy="0"/>
+          <a:chOff x="0" y="0"/>
+          <a:chExt cx="0" cy="0"/>
+        </a:xfrm>
+      </p:grpSpPr>
+      <p:sp>
+        <p:nvSpPr>
+          <p:cNvPr id="2" name="Slide Image Placeholder 1"/>
+          <p:cNvSpPr>
+            <a:spLocks noGrp="1" noRot="1" noChangeAspect="1"/>
+          </p:cNvSpPr>
+          <p:nvPr>
+            <p:ph type="sldImg"/>
+          </p:nvPr>
+        </p:nvSpPr>
+        <p:spPr/>
+      </p:sp>
+      <p:sp>
+        <p:nvSpPr>
+          <p:cNvPr id="3" name="Notes Placeholder 2"/>
+          <p:cNvSpPr>
+            <a:spLocks noGrp="1"/>
+          </p:cNvSpPr>
+          <p:nvPr>
+            <p:ph type="body" idx="1"/>
+          </p:nvPr>
+        </p:nvSpPr>
+        <p:spPr/>
+        <p:txBody>
+          <a:bodyPr/>
+          <a:lstStyle/>
+          <a:p>
+            <a:r>
+              <a:rPr lang="en-US" dirty="0"/>
+              <a:t>Doesn’t work well with concave surfaces</a:t>
+            </a:r>
+          </a:p>
+          <a:p>
+            <a:r>
+              <a:rPr lang="en-US" dirty="0"/>
+              <a:t>Poor shadow quality</a:t>
+            </a:r>
+          </a:p>
+        </p:txBody>
+      </p:sp>
+      <p:sp>
+        <p:nvSpPr>
+          <p:cNvPr id="4" name="Slide Number Placeholder 3"/>
+          <p:cNvSpPr>
+            <a:spLocks noGrp="1"/>
+          </p:cNvSpPr>
+          <p:nvPr>
+            <p:ph type="sldNum" sz="quarter" idx="5"/>
+          </p:nvPr>
+        </p:nvSpPr>
+        <p:spPr/>
+        <p:txBody>
+          <a:bodyPr/>
+          <a:lstStyle/>
+          <a:p>
+            <a:fld id="{7A43C466-EC37-4151-9C60-88A15B00C4B4}" type="slidenum">
+              <a:rPr lang="en-US" smtClean="0"/>
+              <a:t>10</a:t>
+            </a:fld>
+            <a:endParaRPr lang="en-US"/>
+          </a:p>
+        </p:txBody>
+      </p:sp>
+    </p:spTree>
+    <p:extLst>
+      <p:ext uri="{BB962C8B-B14F-4D97-AF65-F5344CB8AC3E}">
+        <p14:creationId xmlns:p14="http://schemas.microsoft.com/office/powerpoint/2010/main" val="1599739237"/>
+      </p:ext>
+    </p:extLst>
+  </p:cSld>
+  <p:clrMapOvr>
+    <a:masterClrMapping/>
+  </p:clrMapOvr>
+</p:notes>
+</file>
+
+<file path=ppt/notesSlides/notesSlide7.xml><?xml version="1.0" encoding="utf-8"?>
+<p:notes xmlns:a="http://schemas.openxmlformats.org/drawingml/2006/main" xmlns:r="http://schemas.openxmlformats.org/officeDocument/2006/relationships" xmlns:p="http://schemas.openxmlformats.org/presentationml/2006/main">
+  <p:cSld>
+    <p:spTree>
+      <p:nvGrpSpPr>
+        <p:cNvPr id="1" name=""/>
+        <p:cNvGrpSpPr/>
+        <p:nvPr/>
+      </p:nvGrpSpPr>
+      <p:grpSpPr>
+        <a:xfrm>
+          <a:off x="0" y="0"/>
+          <a:ext cx="0" cy="0"/>
+          <a:chOff x="0" y="0"/>
+          <a:chExt cx="0" cy="0"/>
+        </a:xfrm>
+      </p:grpSpPr>
+      <p:sp>
+        <p:nvSpPr>
+          <p:cNvPr id="2" name="Slide Image Placeholder 1"/>
+          <p:cNvSpPr>
+            <a:spLocks noGrp="1" noRot="1" noChangeAspect="1"/>
+          </p:cNvSpPr>
+          <p:nvPr>
+            <p:ph type="sldImg"/>
+          </p:nvPr>
+        </p:nvSpPr>
+        <p:spPr/>
+      </p:sp>
+      <p:sp>
+        <p:nvSpPr>
+          <p:cNvPr id="3" name="Notes Placeholder 2"/>
+          <p:cNvSpPr>
+            <a:spLocks noGrp="1"/>
+          </p:cNvSpPr>
+          <p:nvPr>
+            <p:ph type="body" idx="1"/>
+          </p:nvPr>
+        </p:nvSpPr>
+        <p:spPr/>
+        <p:txBody>
+          <a:bodyPr/>
+          <a:lstStyle/>
+          <a:p>
+            <a:r>
+              <a:rPr lang="en-US" dirty="0"/>
+              <a:t>More accurate shadows</a:t>
+            </a:r>
+          </a:p>
+        </p:txBody>
+      </p:sp>
+      <p:sp>
+        <p:nvSpPr>
+          <p:cNvPr id="4" name="Slide Number Placeholder 3"/>
+          <p:cNvSpPr>
+            <a:spLocks noGrp="1"/>
+          </p:cNvSpPr>
+          <p:nvPr>
+            <p:ph type="sldNum" sz="quarter" idx="5"/>
+          </p:nvPr>
+        </p:nvSpPr>
+        <p:spPr/>
+        <p:txBody>
+          <a:bodyPr/>
+          <a:lstStyle/>
+          <a:p>
+            <a:fld id="{7A43C466-EC37-4151-9C60-88A15B00C4B4}" type="slidenum">
+              <a:rPr lang="en-US" smtClean="0"/>
+              <a:t>11</a:t>
+            </a:fld>
+            <a:endParaRPr lang="en-US"/>
+          </a:p>
+        </p:txBody>
+      </p:sp>
+    </p:spTree>
+    <p:extLst>
+      <p:ext uri="{BB962C8B-B14F-4D97-AF65-F5344CB8AC3E}">
+        <p14:creationId xmlns:p14="http://schemas.microsoft.com/office/powerpoint/2010/main" val="936573027"/>
+      </p:ext>
+    </p:extLst>
+  </p:cSld>
+  <p:clrMapOvr>
+    <a:masterClrMapping/>
+  </p:clrMapOvr>
+</p:notes>
+</file>
+
+<file path=ppt/notesSlides/notesSlide8.xml><?xml version="1.0" encoding="utf-8"?>
+<p:notes xmlns:a="http://schemas.openxmlformats.org/drawingml/2006/main" xmlns:r="http://schemas.openxmlformats.org/officeDocument/2006/relationships" xmlns:p="http://schemas.openxmlformats.org/presentationml/2006/main">
+  <p:cSld>
+    <p:spTree>
+      <p:nvGrpSpPr>
+        <p:cNvPr id="1" name=""/>
+        <p:cNvGrpSpPr/>
+        <p:nvPr/>
+      </p:nvGrpSpPr>
+      <p:grpSpPr>
+        <a:xfrm>
+          <a:off x="0" y="0"/>
+          <a:ext cx="0" cy="0"/>
+          <a:chOff x="0" y="0"/>
+          <a:chExt cx="0" cy="0"/>
+        </a:xfrm>
+      </p:grpSpPr>
+      <p:sp>
+        <p:nvSpPr>
+          <p:cNvPr id="2" name="Slide Image Placeholder 1"/>
+          <p:cNvSpPr>
+            <a:spLocks noGrp="1" noRot="1" noChangeAspect="1"/>
+          </p:cNvSpPr>
+          <p:nvPr>
+            <p:ph type="sldImg"/>
+          </p:nvPr>
+        </p:nvSpPr>
+        <p:spPr/>
+      </p:sp>
+      <p:sp>
+        <p:nvSpPr>
+          <p:cNvPr id="3" name="Notes Placeholder 2"/>
+          <p:cNvSpPr>
+            <a:spLocks noGrp="1"/>
+          </p:cNvSpPr>
+          <p:nvPr>
+            <p:ph type="body" idx="1"/>
+          </p:nvPr>
+        </p:nvSpPr>
+        <p:spPr/>
+        <p:txBody>
+          <a:bodyPr/>
+          <a:lstStyle/>
+          <a:p>
+            <a:r>
+              <a:rPr lang="en-US" dirty="0"/>
+              <a:t>b = (v . n) * n</a:t>
+            </a:r>
+          </a:p>
+        </p:txBody>
+      </p:sp>
+      <p:sp>
+        <p:nvSpPr>
+          <p:cNvPr id="4" name="Slide Number Placeholder 3"/>
+          <p:cNvSpPr>
+            <a:spLocks noGrp="1"/>
+          </p:cNvSpPr>
+          <p:nvPr>
+            <p:ph type="sldNum" sz="quarter" idx="5"/>
+          </p:nvPr>
+        </p:nvSpPr>
+        <p:spPr/>
+        <p:txBody>
+          <a:bodyPr/>
+          <a:lstStyle/>
+          <a:p>
+            <a:fld id="{7A43C466-EC37-4151-9C60-88A15B00C4B4}" type="slidenum">
+              <a:rPr lang="en-US" smtClean="0"/>
+              <a:t>12</a:t>
+            </a:fld>
+            <a:endParaRPr lang="en-US"/>
+          </a:p>
+        </p:txBody>
+      </p:sp>
+    </p:spTree>
+    <p:extLst>
+      <p:ext uri="{BB962C8B-B14F-4D97-AF65-F5344CB8AC3E}">
+        <p14:creationId xmlns:p14="http://schemas.microsoft.com/office/powerpoint/2010/main" val="2983993672"/>
+      </p:ext>
+    </p:extLst>
+  </p:cSld>
+  <p:clrMapOvr>
+    <a:masterClrMapping/>
+  </p:clrMapOvr>
+</p:notes>
+</file>
+
 <file path=ppt/slideLayouts/slideLayout1.xml><?xml version="1.0" encoding="utf-8"?>
 <p:sldLayout xmlns:a="http://schemas.openxmlformats.org/drawingml/2006/main" xmlns:r="http://schemas.openxmlformats.org/officeDocument/2006/relationships" xmlns:p="http://schemas.openxmlformats.org/presentationml/2006/main" type="title" preserve="1">
   <p:cSld name="Title Slide">
@@ -269,7 +1730,7 @@
           <a:p>
             <a:fld id="{E05CC1A8-CD15-4548-8D5A-264309F354B4}" type="datetimeFigureOut">
               <a:rPr lang="en-US" smtClean="0"/>
-              <a:t>10/20/2026</a:t>
+              <a:t>10/21/2026</a:t>
             </a:fld>
             <a:endParaRPr lang="en-US"/>
           </a:p>
@@ -467,7 +1928,7 @@
           <a:p>
             <a:fld id="{E05CC1A8-CD15-4548-8D5A-264309F354B4}" type="datetimeFigureOut">
               <a:rPr lang="en-US" smtClean="0"/>
-              <a:t>10/20/2026</a:t>
+              <a:t>10/21/2026</a:t>
             </a:fld>
             <a:endParaRPr lang="en-US"/>
           </a:p>
@@ -675,7 +2136,7 @@
           <a:p>
             <a:fld id="{E05CC1A8-CD15-4548-8D5A-264309F354B4}" type="datetimeFigureOut">
               <a:rPr lang="en-US" smtClean="0"/>
-              <a:t>10/20/2026</a:t>
+              <a:t>10/21/2026</a:t>
             </a:fld>
             <a:endParaRPr lang="en-US"/>
           </a:p>
@@ -873,7 +2334,7 @@
           <a:p>
             <a:fld id="{E05CC1A8-CD15-4548-8D5A-264309F354B4}" type="datetimeFigureOut">
               <a:rPr lang="en-US" smtClean="0"/>
-              <a:t>10/20/2026</a:t>
+              <a:t>10/21/2026</a:t>
             </a:fld>
             <a:endParaRPr lang="en-US"/>
           </a:p>
@@ -1148,7 +2609,7 @@
           <a:p>
             <a:fld id="{E05CC1A8-CD15-4548-8D5A-264309F354B4}" type="datetimeFigureOut">
               <a:rPr lang="en-US" smtClean="0"/>
-              <a:t>10/20/2026</a:t>
+              <a:t>10/21/2026</a:t>
             </a:fld>
             <a:endParaRPr lang="en-US"/>
           </a:p>
@@ -1413,7 +2874,7 @@
           <a:p>
             <a:fld id="{E05CC1A8-CD15-4548-8D5A-264309F354B4}" type="datetimeFigureOut">
               <a:rPr lang="en-US" smtClean="0"/>
-              <a:t>10/20/2026</a:t>
+              <a:t>10/21/2026</a:t>
             </a:fld>
             <a:endParaRPr lang="en-US"/>
           </a:p>
@@ -1825,7 +3286,7 @@
           <a:p>
             <a:fld id="{E05CC1A8-CD15-4548-8D5A-264309F354B4}" type="datetimeFigureOut">
               <a:rPr lang="en-US" smtClean="0"/>
-              <a:t>10/20/2026</a:t>
+              <a:t>10/21/2026</a:t>
             </a:fld>
             <a:endParaRPr lang="en-US"/>
           </a:p>
@@ -1966,7 +3427,7 @@
           <a:p>
             <a:fld id="{E05CC1A8-CD15-4548-8D5A-264309F354B4}" type="datetimeFigureOut">
               <a:rPr lang="en-US" smtClean="0"/>
-              <a:t>10/20/2026</a:t>
+              <a:t>10/21/2026</a:t>
             </a:fld>
             <a:endParaRPr lang="en-US"/>
           </a:p>
@@ -2079,7 +3540,7 @@
           <a:p>
             <a:fld id="{E05CC1A8-CD15-4548-8D5A-264309F354B4}" type="datetimeFigureOut">
               <a:rPr lang="en-US" smtClean="0"/>
-              <a:t>10/20/2026</a:t>
+              <a:t>10/21/2026</a:t>
             </a:fld>
             <a:endParaRPr lang="en-US"/>
           </a:p>
@@ -2390,7 +3851,7 @@
           <a:p>
             <a:fld id="{E05CC1A8-CD15-4548-8D5A-264309F354B4}" type="datetimeFigureOut">
               <a:rPr lang="en-US" smtClean="0"/>
-              <a:t>10/20/2026</a:t>
+              <a:t>10/21/2026</a:t>
             </a:fld>
             <a:endParaRPr lang="en-US"/>
           </a:p>
@@ -2678,7 +4139,7 @@
           <a:p>
             <a:fld id="{E05CC1A8-CD15-4548-8D5A-264309F354B4}" type="datetimeFigureOut">
               <a:rPr lang="en-US" smtClean="0"/>
-              <a:t>10/20/2026</a:t>
+              <a:t>10/21/2026</a:t>
             </a:fld>
             <a:endParaRPr lang="en-US"/>
           </a:p>
@@ -2919,7 +4380,7 @@
           <a:p>
             <a:fld id="{E05CC1A8-CD15-4548-8D5A-264309F354B4}" type="datetimeFigureOut">
               <a:rPr lang="en-US" smtClean="0"/>
-              <a:t>10/20/2026</a:t>
+              <a:t>10/21/2026</a:t>
             </a:fld>
             <a:endParaRPr lang="en-US"/>
           </a:p>
@@ -3322,6 +4783,14 @@
 <file path=ppt/slides/slide1.xml><?xml version="1.0" encoding="utf-8"?>
 <p:sld xmlns:a="http://schemas.openxmlformats.org/drawingml/2006/main" xmlns:r="http://schemas.openxmlformats.org/officeDocument/2006/relationships" xmlns:p="http://schemas.openxmlformats.org/presentationml/2006/main">
   <p:cSld>
+    <p:bg>
+      <p:bgPr>
+        <a:solidFill>
+          <a:schemeClr val="tx1"/>
+        </a:solidFill>
+        <a:effectLst/>
+      </p:bgPr>
+    </p:bg>
     <p:spTree>
       <p:nvGrpSpPr>
         <p:cNvPr id="1" name=""/>
@@ -3336,45 +4805,12 @@
           <a:chExt cx="0" cy="0"/>
         </a:xfrm>
       </p:grpSpPr>
-      <p:sp>
-        <p:nvSpPr>
-          <p:cNvPr id="2" name="Title 1">
-            <a:extLst>
-              <a:ext uri="{FF2B5EF4-FFF2-40B4-BE49-F238E27FC236}">
-                <a16:creationId xmlns:a16="http://schemas.microsoft.com/office/drawing/2014/main" id="{E2983BFB-E824-7285-B9DC-F6C364DB84E4}"/>
-              </a:ext>
-            </a:extLst>
-          </p:cNvPr>
-          <p:cNvSpPr>
-            <a:spLocks noGrp="1"/>
-          </p:cNvSpPr>
-          <p:nvPr>
-            <p:ph type="ctrTitle"/>
-          </p:nvPr>
-        </p:nvSpPr>
-        <p:spPr>
-          <a:xfrm>
-            <a:off x="1524000" y="1129950"/>
-            <a:ext cx="9144000" cy="940499"/>
-          </a:xfrm>
-        </p:spPr>
-        <p:txBody>
-          <a:bodyPr/>
-          <a:lstStyle/>
-          <a:p>
-            <a:r>
-              <a:rPr lang="en-US" dirty="0"/>
-              <a:t>Raytracing Workshop</a:t>
-            </a:r>
-          </a:p>
-        </p:txBody>
-      </p:sp>
       <p:pic>
         <p:nvPicPr>
-          <p:cNvPr id="5" name="Picture 4">
-            <a:extLst>
-              <a:ext uri="{FF2B5EF4-FFF2-40B4-BE49-F238E27FC236}">
-                <a16:creationId xmlns:a16="http://schemas.microsoft.com/office/drawing/2014/main" id="{8473172D-D59F-C693-C896-85793FA9C99B}"/>
+          <p:cNvPr id="7" name="Picture 6">
+            <a:extLst>
+              <a:ext uri="{FF2B5EF4-FFF2-40B4-BE49-F238E27FC236}">
+                <a16:creationId xmlns:a16="http://schemas.microsoft.com/office/drawing/2014/main" id="{E474CADE-5067-6DF6-280A-B6B4608824AF}"/>
               </a:ext>
             </a:extLst>
           </p:cNvPr>
@@ -3391,15 +4827,14 @@
               </a:ext>
             </a:extLst>
           </a:blip>
-          <a:srcRect l="2375" t="2369" r="2165" b="2237"/>
           <a:stretch>
             <a:fillRect/>
           </a:stretch>
         </p:blipFill>
         <p:spPr>
           <a:xfrm>
-            <a:off x="4376737" y="2984658"/>
-            <a:ext cx="3438525" cy="3436145"/>
+            <a:off x="2667000" y="0"/>
+            <a:ext cx="6858000" cy="6858000"/>
           </a:xfrm>
           <a:prstGeom prst="rect">
             <a:avLst/>
@@ -3441,7 +4876,7 @@
           <p:cNvPr id="2" name="Title 1">
             <a:extLst>
               <a:ext uri="{FF2B5EF4-FFF2-40B4-BE49-F238E27FC236}">
-                <a16:creationId xmlns:a16="http://schemas.microsoft.com/office/drawing/2014/main" id="{665775D9-5D5A-63F0-6384-FB38310BC95A}"/>
+                <a16:creationId xmlns:a16="http://schemas.microsoft.com/office/drawing/2014/main" id="{D3EE4EF4-7B78-6382-B587-6656D5DFDF12}"/>
               </a:ext>
             </a:extLst>
           </p:cNvPr>
@@ -3459,7 +4894,7 @@
           <a:p>
             <a:r>
               <a:rPr lang="en-US" dirty="0"/>
-              <a:t>Lambertian scattering</a:t>
+              <a:t>Diffuse scattering</a:t>
             </a:r>
           </a:p>
         </p:txBody>
@@ -3469,7 +4904,7 @@
           <p:cNvPr id="3" name="Content Placeholder 2">
             <a:extLst>
               <a:ext uri="{FF2B5EF4-FFF2-40B4-BE49-F238E27FC236}">
-                <a16:creationId xmlns:a16="http://schemas.microsoft.com/office/drawing/2014/main" id="{A8E609E8-C514-51E0-E40C-64CAA9B67260}"/>
+                <a16:creationId xmlns:a16="http://schemas.microsoft.com/office/drawing/2014/main" id="{D20249F7-BAD9-E8A4-0AB3-C5F0DD9754DA}"/>
               </a:ext>
             </a:extLst>
           </p:cNvPr>
@@ -3487,13 +4922,13 @@
           <a:p>
             <a:r>
               <a:rPr lang="en-US" dirty="0"/>
-              <a:t>Similar to diffuse scattering</a:t>
-            </a:r>
-          </a:p>
-          <a:p>
-            <a:r>
-              <a:rPr lang="en-US" dirty="0"/>
-              <a:t>Rays are more likely to scatter near the normal</a:t>
+              <a:t>Mimics rough, non-reflective surfaces</a:t>
+            </a:r>
+          </a:p>
+          <a:p>
+            <a:r>
+              <a:rPr lang="en-US" dirty="0"/>
+              <a:t>A ray is bounced in a random direction in the same hemisphere as the normal</a:t>
             </a:r>
           </a:p>
         </p:txBody>
@@ -3503,37 +4938,7 @@
           <p:cNvPr id="4" name="Picture 3">
             <a:extLst>
               <a:ext uri="{FF2B5EF4-FFF2-40B4-BE49-F238E27FC236}">
-                <a16:creationId xmlns:a16="http://schemas.microsoft.com/office/drawing/2014/main" id="{60CC60E3-AE9F-6D0E-8C7A-8714F39EFC1B}"/>
-              </a:ext>
-            </a:extLst>
-          </p:cNvPr>
-          <p:cNvPicPr>
-            <a:picLocks noChangeAspect="1"/>
-          </p:cNvPicPr>
-          <p:nvPr/>
-        </p:nvPicPr>
-        <p:blipFill>
-          <a:blip r:embed="rId2"/>
-          <a:stretch>
-            <a:fillRect/>
-          </a:stretch>
-        </p:blipFill>
-        <p:spPr>
-          <a:xfrm>
-            <a:off x="1085850" y="3555932"/>
-            <a:ext cx="2587763" cy="2755968"/>
-          </a:xfrm>
-          <a:prstGeom prst="rect">
-            <a:avLst/>
-          </a:prstGeom>
-        </p:spPr>
-      </p:pic>
-      <p:pic>
-        <p:nvPicPr>
-          <p:cNvPr id="5" name="Picture 4">
-            <a:extLst>
-              <a:ext uri="{FF2B5EF4-FFF2-40B4-BE49-F238E27FC236}">
-                <a16:creationId xmlns:a16="http://schemas.microsoft.com/office/drawing/2014/main" id="{5547BA82-4259-55CB-A689-DBD4A5E6E031}"/>
+                <a16:creationId xmlns:a16="http://schemas.microsoft.com/office/drawing/2014/main" id="{0C8D7C44-5AB3-6ECC-81D2-4407FB5363DE}"/>
               </a:ext>
             </a:extLst>
           </p:cNvPr>
@@ -3550,7 +4955,37 @@
         </p:blipFill>
         <p:spPr>
           <a:xfrm>
-            <a:off x="7296150" y="3719512"/>
+            <a:off x="1444752" y="3244789"/>
+            <a:ext cx="4352544" cy="3248086"/>
+          </a:xfrm>
+          <a:prstGeom prst="rect">
+            <a:avLst/>
+          </a:prstGeom>
+        </p:spPr>
+      </p:pic>
+      <p:pic>
+        <p:nvPicPr>
+          <p:cNvPr id="6" name="Picture 5">
+            <a:extLst>
+              <a:ext uri="{FF2B5EF4-FFF2-40B4-BE49-F238E27FC236}">
+                <a16:creationId xmlns:a16="http://schemas.microsoft.com/office/drawing/2014/main" id="{BD040E98-4AC4-6124-E6A2-F230E0ACC1BF}"/>
+              </a:ext>
+            </a:extLst>
+          </p:cNvPr>
+          <p:cNvPicPr>
+            <a:picLocks noChangeAspect="1"/>
+          </p:cNvPicPr>
+          <p:nvPr/>
+        </p:nvPicPr>
+        <p:blipFill>
+          <a:blip r:embed="rId4"/>
+          <a:stretch>
+            <a:fillRect/>
+          </a:stretch>
+        </p:blipFill>
+        <p:spPr>
+          <a:xfrm>
+            <a:off x="7315200" y="3657600"/>
             <a:ext cx="3810000" cy="2143125"/>
           </a:xfrm>
           <a:prstGeom prst="rect">
@@ -3561,7 +4996,7 @@
     </p:spTree>
     <p:extLst>
       <p:ext uri="{BB962C8B-B14F-4D97-AF65-F5344CB8AC3E}">
-        <p14:creationId xmlns:p14="http://schemas.microsoft.com/office/powerpoint/2010/main" val="2857300518"/>
+        <p14:creationId xmlns:p14="http://schemas.microsoft.com/office/powerpoint/2010/main" val="2517021950"/>
       </p:ext>
     </p:extLst>
   </p:cSld>
@@ -3593,7 +5028,7 @@
           <p:cNvPr id="2" name="Title 1">
             <a:extLst>
               <a:ext uri="{FF2B5EF4-FFF2-40B4-BE49-F238E27FC236}">
-                <a16:creationId xmlns:a16="http://schemas.microsoft.com/office/drawing/2014/main" id="{F243D515-79A7-F2AE-5A87-4289D5D07CF5}"/>
+                <a16:creationId xmlns:a16="http://schemas.microsoft.com/office/drawing/2014/main" id="{665775D9-5D5A-63F0-6384-FB38310BC95A}"/>
               </a:ext>
             </a:extLst>
           </p:cNvPr>
@@ -3611,7 +5046,7 @@
           <a:p>
             <a:r>
               <a:rPr lang="en-US" dirty="0"/>
-              <a:t>Reflective scattering</a:t>
+              <a:t>Lambertian scattering</a:t>
             </a:r>
           </a:p>
         </p:txBody>
@@ -3621,7 +5056,7 @@
           <p:cNvPr id="3" name="Content Placeholder 2">
             <a:extLst>
               <a:ext uri="{FF2B5EF4-FFF2-40B4-BE49-F238E27FC236}">
-                <a16:creationId xmlns:a16="http://schemas.microsoft.com/office/drawing/2014/main" id="{6C1CF31F-3DB4-17EE-1C39-0C9780881A02}"/>
+                <a16:creationId xmlns:a16="http://schemas.microsoft.com/office/drawing/2014/main" id="{A8E609E8-C514-51E0-E40C-64CAA9B67260}"/>
               </a:ext>
             </a:extLst>
           </p:cNvPr>
@@ -3639,11 +5074,14 @@
           <a:p>
             <a:r>
               <a:rPr lang="en-US" dirty="0"/>
-              <a:t>Used to mimic metals, mirrors, and other reflective surfaces</a:t>
-            </a:r>
-          </a:p>
-          <a:p>
-            <a:endParaRPr lang="en-US" dirty="0"/>
+              <a:t>Similar to diffuse scattering</a:t>
+            </a:r>
+          </a:p>
+          <a:p>
+            <a:r>
+              <a:rPr lang="en-US" dirty="0"/>
+              <a:t>Rays are more likely to scatter near the normal</a:t>
+            </a:r>
           </a:p>
         </p:txBody>
       </p:sp>
@@ -3652,37 +5090,7 @@
           <p:cNvPr id="4" name="Picture 3">
             <a:extLst>
               <a:ext uri="{FF2B5EF4-FFF2-40B4-BE49-F238E27FC236}">
-                <a16:creationId xmlns:a16="http://schemas.microsoft.com/office/drawing/2014/main" id="{E79E979B-9688-0157-E7F3-C9F34139B97F}"/>
-              </a:ext>
-            </a:extLst>
-          </p:cNvPr>
-          <p:cNvPicPr>
-            <a:picLocks noChangeAspect="1"/>
-          </p:cNvPicPr>
-          <p:nvPr/>
-        </p:nvPicPr>
-        <p:blipFill>
-          <a:blip r:embed="rId2"/>
-          <a:stretch>
-            <a:fillRect/>
-          </a:stretch>
-        </p:blipFill>
-        <p:spPr>
-          <a:xfrm>
-            <a:off x="1371600" y="2852738"/>
-            <a:ext cx="3448050" cy="2633448"/>
-          </a:xfrm>
-          <a:prstGeom prst="rect">
-            <a:avLst/>
-          </a:prstGeom>
-        </p:spPr>
-      </p:pic>
-      <p:pic>
-        <p:nvPicPr>
-          <p:cNvPr id="5" name="Picture 4">
-            <a:extLst>
-              <a:ext uri="{FF2B5EF4-FFF2-40B4-BE49-F238E27FC236}">
-                <a16:creationId xmlns:a16="http://schemas.microsoft.com/office/drawing/2014/main" id="{FCC0A1CE-DE01-EDEB-A54B-6F5F83FF02F8}"/>
+                <a16:creationId xmlns:a16="http://schemas.microsoft.com/office/drawing/2014/main" id="{60CC60E3-AE9F-6D0E-8C7A-8714F39EFC1B}"/>
               </a:ext>
             </a:extLst>
           </p:cNvPr>
@@ -3699,7 +5107,186 @@
         </p:blipFill>
         <p:spPr>
           <a:xfrm>
-            <a:off x="6429375" y="3195637"/>
+            <a:off x="1085850" y="3555932"/>
+            <a:ext cx="2587763" cy="2755968"/>
+          </a:xfrm>
+          <a:prstGeom prst="rect">
+            <a:avLst/>
+          </a:prstGeom>
+        </p:spPr>
+      </p:pic>
+      <p:pic>
+        <p:nvPicPr>
+          <p:cNvPr id="5" name="Picture 4">
+            <a:extLst>
+              <a:ext uri="{FF2B5EF4-FFF2-40B4-BE49-F238E27FC236}">
+                <a16:creationId xmlns:a16="http://schemas.microsoft.com/office/drawing/2014/main" id="{5547BA82-4259-55CB-A689-DBD4A5E6E031}"/>
+              </a:ext>
+            </a:extLst>
+          </p:cNvPr>
+          <p:cNvPicPr>
+            <a:picLocks noChangeAspect="1"/>
+          </p:cNvPicPr>
+          <p:nvPr/>
+        </p:nvPicPr>
+        <p:blipFill>
+          <a:blip r:embed="rId4"/>
+          <a:stretch>
+            <a:fillRect/>
+          </a:stretch>
+        </p:blipFill>
+        <p:spPr>
+          <a:xfrm>
+            <a:off x="7315200" y="3657600"/>
+            <a:ext cx="3810000" cy="2143125"/>
+          </a:xfrm>
+          <a:prstGeom prst="rect">
+            <a:avLst/>
+          </a:prstGeom>
+        </p:spPr>
+      </p:pic>
+    </p:spTree>
+    <p:extLst>
+      <p:ext uri="{BB962C8B-B14F-4D97-AF65-F5344CB8AC3E}">
+        <p14:creationId xmlns:p14="http://schemas.microsoft.com/office/powerpoint/2010/main" val="2857300518"/>
+      </p:ext>
+    </p:extLst>
+  </p:cSld>
+  <p:clrMapOvr>
+    <a:masterClrMapping/>
+  </p:clrMapOvr>
+</p:sld>
+</file>
+
+<file path=ppt/slides/slide12.xml><?xml version="1.0" encoding="utf-8"?>
+<p:sld xmlns:a="http://schemas.openxmlformats.org/drawingml/2006/main" xmlns:r="http://schemas.openxmlformats.org/officeDocument/2006/relationships" xmlns:p="http://schemas.openxmlformats.org/presentationml/2006/main">
+  <p:cSld>
+    <p:spTree>
+      <p:nvGrpSpPr>
+        <p:cNvPr id="1" name=""/>
+        <p:cNvGrpSpPr/>
+        <p:nvPr/>
+      </p:nvGrpSpPr>
+      <p:grpSpPr>
+        <a:xfrm>
+          <a:off x="0" y="0"/>
+          <a:ext cx="0" cy="0"/>
+          <a:chOff x="0" y="0"/>
+          <a:chExt cx="0" cy="0"/>
+        </a:xfrm>
+      </p:grpSpPr>
+      <p:sp>
+        <p:nvSpPr>
+          <p:cNvPr id="2" name="Title 1">
+            <a:extLst>
+              <a:ext uri="{FF2B5EF4-FFF2-40B4-BE49-F238E27FC236}">
+                <a16:creationId xmlns:a16="http://schemas.microsoft.com/office/drawing/2014/main" id="{F243D515-79A7-F2AE-5A87-4289D5D07CF5}"/>
+              </a:ext>
+            </a:extLst>
+          </p:cNvPr>
+          <p:cNvSpPr>
+            <a:spLocks noGrp="1"/>
+          </p:cNvSpPr>
+          <p:nvPr>
+            <p:ph type="title"/>
+          </p:nvPr>
+        </p:nvSpPr>
+        <p:spPr/>
+        <p:txBody>
+          <a:bodyPr/>
+          <a:lstStyle/>
+          <a:p>
+            <a:r>
+              <a:rPr lang="en-US" dirty="0"/>
+              <a:t>Reflective scattering</a:t>
+            </a:r>
+          </a:p>
+        </p:txBody>
+      </p:sp>
+      <p:sp>
+        <p:nvSpPr>
+          <p:cNvPr id="3" name="Content Placeholder 2">
+            <a:extLst>
+              <a:ext uri="{FF2B5EF4-FFF2-40B4-BE49-F238E27FC236}">
+                <a16:creationId xmlns:a16="http://schemas.microsoft.com/office/drawing/2014/main" id="{6C1CF31F-3DB4-17EE-1C39-0C9780881A02}"/>
+              </a:ext>
+            </a:extLst>
+          </p:cNvPr>
+          <p:cNvSpPr>
+            <a:spLocks noGrp="1"/>
+          </p:cNvSpPr>
+          <p:nvPr>
+            <p:ph idx="1"/>
+          </p:nvPr>
+        </p:nvSpPr>
+        <p:spPr/>
+        <p:txBody>
+          <a:bodyPr/>
+          <a:lstStyle/>
+          <a:p>
+            <a:r>
+              <a:rPr lang="en-US" dirty="0"/>
+              <a:t>Used to mimic metals, mirrors, and other reflective surfaces</a:t>
+            </a:r>
+          </a:p>
+          <a:p>
+            <a:endParaRPr lang="en-US" dirty="0"/>
+          </a:p>
+        </p:txBody>
+      </p:sp>
+      <p:pic>
+        <p:nvPicPr>
+          <p:cNvPr id="4" name="Picture 3">
+            <a:extLst>
+              <a:ext uri="{FF2B5EF4-FFF2-40B4-BE49-F238E27FC236}">
+                <a16:creationId xmlns:a16="http://schemas.microsoft.com/office/drawing/2014/main" id="{E79E979B-9688-0157-E7F3-C9F34139B97F}"/>
+              </a:ext>
+            </a:extLst>
+          </p:cNvPr>
+          <p:cNvPicPr>
+            <a:picLocks noChangeAspect="1"/>
+          </p:cNvPicPr>
+          <p:nvPr/>
+        </p:nvPicPr>
+        <p:blipFill>
+          <a:blip r:embed="rId3"/>
+          <a:stretch>
+            <a:fillRect/>
+          </a:stretch>
+        </p:blipFill>
+        <p:spPr>
+          <a:xfrm>
+            <a:off x="1428751" y="3167277"/>
+            <a:ext cx="3448050" cy="2633448"/>
+          </a:xfrm>
+          <a:prstGeom prst="rect">
+            <a:avLst/>
+          </a:prstGeom>
+        </p:spPr>
+      </p:pic>
+      <p:pic>
+        <p:nvPicPr>
+          <p:cNvPr id="5" name="Picture 4">
+            <a:extLst>
+              <a:ext uri="{FF2B5EF4-FFF2-40B4-BE49-F238E27FC236}">
+                <a16:creationId xmlns:a16="http://schemas.microsoft.com/office/drawing/2014/main" id="{FCC0A1CE-DE01-EDEB-A54B-6F5F83FF02F8}"/>
+              </a:ext>
+            </a:extLst>
+          </p:cNvPr>
+          <p:cNvPicPr>
+            <a:picLocks noChangeAspect="1"/>
+          </p:cNvPicPr>
+          <p:nvPr/>
+        </p:nvPicPr>
+        <p:blipFill>
+          <a:blip r:embed="rId4"/>
+          <a:stretch>
+            <a:fillRect/>
+          </a:stretch>
+        </p:blipFill>
+        <p:spPr>
+          <a:xfrm>
+            <a:off x="7315200" y="3657600"/>
             <a:ext cx="3810000" cy="2143125"/>
           </a:xfrm>
           <a:prstGeom prst="rect">
@@ -3711,6 +5298,140 @@
     <p:extLst>
       <p:ext uri="{BB962C8B-B14F-4D97-AF65-F5344CB8AC3E}">
         <p14:creationId xmlns:p14="http://schemas.microsoft.com/office/powerpoint/2010/main" val="3009909895"/>
+      </p:ext>
+    </p:extLst>
+  </p:cSld>
+  <p:clrMapOvr>
+    <a:masterClrMapping/>
+  </p:clrMapOvr>
+</p:sld>
+</file>
+
+<file path=ppt/slides/slide13.xml><?xml version="1.0" encoding="utf-8"?>
+<p:sld xmlns:a="http://schemas.openxmlformats.org/drawingml/2006/main" xmlns:r="http://schemas.openxmlformats.org/officeDocument/2006/relationships" xmlns:p="http://schemas.openxmlformats.org/presentationml/2006/main">
+  <p:cSld>
+    <p:spTree>
+      <p:nvGrpSpPr>
+        <p:cNvPr id="1" name=""/>
+        <p:cNvGrpSpPr/>
+        <p:nvPr/>
+      </p:nvGrpSpPr>
+      <p:grpSpPr>
+        <a:xfrm>
+          <a:off x="0" y="0"/>
+          <a:ext cx="0" cy="0"/>
+          <a:chOff x="0" y="0"/>
+          <a:chExt cx="0" cy="0"/>
+        </a:xfrm>
+      </p:grpSpPr>
+      <p:sp>
+        <p:nvSpPr>
+          <p:cNvPr id="2" name="Title 1">
+            <a:extLst>
+              <a:ext uri="{FF2B5EF4-FFF2-40B4-BE49-F238E27FC236}">
+                <a16:creationId xmlns:a16="http://schemas.microsoft.com/office/drawing/2014/main" id="{CCCE43DD-E4BF-40BD-23C7-C253694FC7AF}"/>
+              </a:ext>
+            </a:extLst>
+          </p:cNvPr>
+          <p:cNvSpPr>
+            <a:spLocks noGrp="1"/>
+          </p:cNvSpPr>
+          <p:nvPr>
+            <p:ph type="title"/>
+          </p:nvPr>
+        </p:nvSpPr>
+        <p:spPr>
+          <a:xfrm>
+            <a:off x="838200" y="365125"/>
+            <a:ext cx="10515600" cy="6166304"/>
+          </a:xfrm>
+        </p:spPr>
+        <p:txBody>
+          <a:bodyPr/>
+          <a:lstStyle/>
+          <a:p>
+            <a:pPr algn="ctr"/>
+            <a:r>
+              <a:rPr lang="en-US" dirty="0"/>
+              <a:t>Questions about ray tracing</a:t>
+            </a:r>
+          </a:p>
+        </p:txBody>
+      </p:sp>
+    </p:spTree>
+    <p:extLst>
+      <p:ext uri="{BB962C8B-B14F-4D97-AF65-F5344CB8AC3E}">
+        <p14:creationId xmlns:p14="http://schemas.microsoft.com/office/powerpoint/2010/main" val="4237796279"/>
+      </p:ext>
+    </p:extLst>
+  </p:cSld>
+  <p:clrMapOvr>
+    <a:masterClrMapping/>
+  </p:clrMapOvr>
+</p:sld>
+</file>
+
+<file path=ppt/slides/slide14.xml><?xml version="1.0" encoding="utf-8"?>
+<p:sld xmlns:a="http://schemas.openxmlformats.org/drawingml/2006/main" xmlns:r="http://schemas.openxmlformats.org/officeDocument/2006/relationships" xmlns:p="http://schemas.openxmlformats.org/presentationml/2006/main">
+  <p:cSld>
+    <p:spTree>
+      <p:nvGrpSpPr>
+        <p:cNvPr id="1" name="">
+          <a:extLst>
+            <a:ext uri="{FF2B5EF4-FFF2-40B4-BE49-F238E27FC236}">
+              <a16:creationId xmlns:a16="http://schemas.microsoft.com/office/drawing/2014/main" id="{2F549E49-C4BA-E0F3-1784-A621C96D10B2}"/>
+            </a:ext>
+          </a:extLst>
+        </p:cNvPr>
+        <p:cNvGrpSpPr/>
+        <p:nvPr/>
+      </p:nvGrpSpPr>
+      <p:grpSpPr>
+        <a:xfrm>
+          <a:off x="0" y="0"/>
+          <a:ext cx="0" cy="0"/>
+          <a:chOff x="0" y="0"/>
+          <a:chExt cx="0" cy="0"/>
+        </a:xfrm>
+      </p:grpSpPr>
+      <p:sp>
+        <p:nvSpPr>
+          <p:cNvPr id="2" name="Title 1">
+            <a:extLst>
+              <a:ext uri="{FF2B5EF4-FFF2-40B4-BE49-F238E27FC236}">
+                <a16:creationId xmlns:a16="http://schemas.microsoft.com/office/drawing/2014/main" id="{60C0527C-713F-3313-928B-208B99550D47}"/>
+              </a:ext>
+            </a:extLst>
+          </p:cNvPr>
+          <p:cNvSpPr>
+            <a:spLocks noGrp="1"/>
+          </p:cNvSpPr>
+          <p:nvPr>
+            <p:ph type="title"/>
+          </p:nvPr>
+        </p:nvSpPr>
+        <p:spPr>
+          <a:xfrm>
+            <a:off x="838200" y="365125"/>
+            <a:ext cx="10515600" cy="6166304"/>
+          </a:xfrm>
+        </p:spPr>
+        <p:txBody>
+          <a:bodyPr/>
+          <a:lstStyle/>
+          <a:p>
+            <a:pPr algn="ctr"/>
+            <a:r>
+              <a:rPr lang="en-US" dirty="0"/>
+              <a:t>The secret super cool raytracing website</a:t>
+            </a:r>
+          </a:p>
+        </p:txBody>
+      </p:sp>
+    </p:spTree>
+    <p:extLst>
+      <p:ext uri="{BB962C8B-B14F-4D97-AF65-F5344CB8AC3E}">
+        <p14:creationId xmlns:p14="http://schemas.microsoft.com/office/powerpoint/2010/main" val="2202717159"/>
       </p:ext>
     </p:extLst>
   </p:cSld>
@@ -3793,7 +5514,7 @@
           <a:p>
             <a:r>
               <a:rPr lang="en-US" dirty="0"/>
-              <a:t>How do we render a 3d scene to a 2d image?</a:t>
+              <a:t>How do we render a 3D scene to a 2D image?</a:t>
             </a:r>
           </a:p>
         </p:txBody>
@@ -3813,7 +5534,7 @@
           <p:nvPr/>
         </p:nvPicPr>
         <p:blipFill>
-          <a:blip r:embed="rId2"/>
+          <a:blip r:embed="rId3"/>
           <a:srcRect b="3093"/>
           <a:stretch>
             <a:fillRect/>
@@ -3844,7 +5565,7 @@
           <p:nvPr/>
         </p:nvPicPr>
         <p:blipFill>
-          <a:blip r:embed="rId3"/>
+          <a:blip r:embed="rId4"/>
           <a:stretch>
             <a:fillRect/>
           </a:stretch>
@@ -3874,7 +5595,7 @@
           <p:nvPr/>
         </p:nvPicPr>
         <p:blipFill>
-          <a:blip r:embed="rId4"/>
+          <a:blip r:embed="rId5"/>
           <a:stretch>
             <a:fillRect/>
           </a:stretch>
@@ -4068,7 +5789,12 @@
             <p:ph idx="1"/>
           </p:nvPr>
         </p:nvSpPr>
-        <p:spPr/>
+        <p:spPr>
+          <a:xfrm>
+            <a:off x="838200" y="1825625"/>
+            <a:ext cx="5663184" cy="4351338"/>
+          </a:xfrm>
+        </p:spPr>
         <p:txBody>
           <a:bodyPr/>
           <a:lstStyle/>
@@ -4094,6 +5820,12 @@
             <a:r>
               <a:rPr lang="en-US" dirty="0"/>
               <a:t>Rays hit the camera sensor</a:t>
+            </a:r>
+          </a:p>
+          <a:p>
+            <a:r>
+              <a:rPr lang="en-US" dirty="0"/>
+              <a:t>Record the pixel color where the light ray hit the camera</a:t>
             </a:r>
           </a:p>
           <a:p>
@@ -4119,14 +5851,14 @@
           <p:nvPr/>
         </p:nvPicPr>
         <p:blipFill>
-          <a:blip r:embed="rId2"/>
+          <a:blip r:embed="rId3"/>
           <a:stretch>
             <a:fillRect/>
           </a:stretch>
         </p:blipFill>
         <p:spPr>
           <a:xfrm>
-            <a:off x="6791325" y="3309282"/>
+            <a:off x="6901053" y="2162609"/>
             <a:ext cx="4886325" cy="3183593"/>
           </a:xfrm>
           <a:prstGeom prst="rect">
@@ -4192,8 +5924,8 @@
           </a:p>
         </p:txBody>
       </p:sp>
-      <mc:AlternateContent xmlns:mc="http://schemas.openxmlformats.org/markup-compatibility/2006">
-        <mc:Choice xmlns:a14="http://schemas.microsoft.com/office/drawing/2010/main" Requires="a14">
+      <mc:AlternateContent xmlns:mc="http://schemas.openxmlformats.org/markup-compatibility/2006" xmlns:a14="http://schemas.microsoft.com/office/drawing/2010/main">
+        <mc:Choice Requires="a14">
           <p:sp>
             <p:nvSpPr>
               <p:cNvPr id="3" name="Content Placeholder 2">
@@ -4221,29 +5953,17 @@
                 </a:r>
                 <a14:m>
                   <m:oMath xmlns:m="http://schemas.openxmlformats.org/officeDocument/2006/math">
-                    <m:acc>
-                      <m:accPr>
-                        <m:chr m:val="⃗"/>
-                        <m:ctrlPr>
-                          <a:rPr lang="en-US" b="0" i="1" smtClean="0">
-                            <a:latin typeface="Cambria Math" panose="02040503050406030204" pitchFamily="18" charset="0"/>
-                          </a:rPr>
-                        </m:ctrlPr>
-                      </m:accPr>
-                      <m:e>
-                        <m:r>
-                          <a:rPr lang="en-US" b="0" i="1" smtClean="0">
-                            <a:latin typeface="Cambria Math" panose="02040503050406030204" pitchFamily="18" charset="0"/>
-                          </a:rPr>
-                          <m:t>𝑂</m:t>
-                        </m:r>
-                      </m:e>
-                    </m:acc>
+                    <m:r>
+                      <a:rPr lang="en-US" b="0" i="1" smtClean="0">
+                        <a:latin typeface="Cambria Math" panose="02040503050406030204" pitchFamily="18" charset="0"/>
+                      </a:rPr>
+                      <m:t>𝑂</m:t>
+                    </m:r>
                   </m:oMath>
                 </a14:m>
                 <a:r>
                   <a:rPr lang="en-US" dirty="0"/>
-                  <a:t> and direction </a:t>
+                  <a:t> and a non-zero direction </a:t>
                 </a:r>
                 <a14:m>
                   <m:oMath xmlns:m="http://schemas.openxmlformats.org/officeDocument/2006/math">
@@ -4278,7 +5998,15 @@
               <a:p>
                 <a:r>
                   <a:rPr lang="en-US" dirty="0"/>
-                  <a:t>A time value </a:t>
+                  <a:t>A </a:t>
+                </a:r>
+                <a:r>
+                  <a:rPr lang="en-US" i="1" dirty="0"/>
+                  <a:t>positive</a:t>
+                </a:r>
+                <a:r>
+                  <a:rPr lang="en-US" dirty="0"/>
+                  <a:t> time value </a:t>
                 </a:r>
                 <a14:m>
                   <m:oMath xmlns:m="http://schemas.openxmlformats.org/officeDocument/2006/math">
@@ -4370,7 +6098,7 @@
             </p:txBody>
           </p:sp>
         </mc:Choice>
-        <mc:Fallback>
+        <mc:Fallback xmlns="">
           <p:sp>
             <p:nvSpPr>
               <p:cNvPr id="3" name="Content Placeholder 2">
@@ -4389,7 +6117,7 @@
             </p:nvSpPr>
             <p:spPr>
               <a:blipFill>
-                <a:blip r:embed="rId2"/>
+                <a:blip r:embed="rId3"/>
                 <a:stretch>
                   <a:fillRect l="-1043" t="-980"/>
                 </a:stretch>
@@ -4410,36 +6138,109 @@
           </p:sp>
         </mc:Fallback>
       </mc:AlternateContent>
-      <p:pic>
-        <p:nvPicPr>
-          <p:cNvPr id="5" name="Picture 4">
-            <a:extLst>
-              <a:ext uri="{FF2B5EF4-FFF2-40B4-BE49-F238E27FC236}">
-                <a16:creationId xmlns:a16="http://schemas.microsoft.com/office/drawing/2014/main" id="{875E069C-267F-DDA8-F6A0-DD6CC07F113C}"/>
-              </a:ext>
-            </a:extLst>
-          </p:cNvPr>
-          <p:cNvPicPr>
-            <a:picLocks noChangeAspect="1"/>
-          </p:cNvPicPr>
+      <p:grpSp>
+        <p:nvGrpSpPr>
+          <p:cNvPr id="6" name="Group 5">
+            <a:extLst>
+              <a:ext uri="{FF2B5EF4-FFF2-40B4-BE49-F238E27FC236}">
+                <a16:creationId xmlns:a16="http://schemas.microsoft.com/office/drawing/2014/main" id="{15417630-1F95-CBFF-1063-D67BF4A9AEE3}"/>
+              </a:ext>
+            </a:extLst>
+          </p:cNvPr>
+          <p:cNvGrpSpPr/>
           <p:nvPr/>
-        </p:nvPicPr>
-        <p:blipFill>
-          <a:blip r:embed="rId3"/>
-          <a:stretch>
-            <a:fillRect/>
-          </a:stretch>
-        </p:blipFill>
-        <p:spPr>
+        </p:nvGrpSpPr>
+        <p:grpSpPr>
           <a:xfrm>
-            <a:off x="5749531" y="3699941"/>
+            <a:off x="4820662" y="3885547"/>
             <a:ext cx="4217430" cy="1685397"/>
+            <a:chOff x="5749531" y="3699941"/>
+            <a:chExt cx="4217430" cy="1685397"/>
           </a:xfrm>
-          <a:prstGeom prst="rect">
-            <a:avLst/>
-          </a:prstGeom>
-        </p:spPr>
-      </p:pic>
+        </p:grpSpPr>
+        <p:pic>
+          <p:nvPicPr>
+            <p:cNvPr id="5" name="Picture 4">
+              <a:extLst>
+                <a:ext uri="{FF2B5EF4-FFF2-40B4-BE49-F238E27FC236}">
+                  <a16:creationId xmlns:a16="http://schemas.microsoft.com/office/drawing/2014/main" id="{875E069C-267F-DDA8-F6A0-DD6CC07F113C}"/>
+                </a:ext>
+              </a:extLst>
+            </p:cNvPr>
+            <p:cNvPicPr>
+              <a:picLocks noChangeAspect="1"/>
+            </p:cNvPicPr>
+            <p:nvPr/>
+          </p:nvPicPr>
+          <p:blipFill>
+            <a:blip r:embed="rId4"/>
+            <a:stretch>
+              <a:fillRect/>
+            </a:stretch>
+          </p:blipFill>
+          <p:spPr>
+            <a:xfrm>
+              <a:off x="5749531" y="3699941"/>
+              <a:ext cx="4217430" cy="1685397"/>
+            </a:xfrm>
+            <a:prstGeom prst="rect">
+              <a:avLst/>
+            </a:prstGeom>
+          </p:spPr>
+        </p:pic>
+        <p:sp>
+          <p:nvSpPr>
+            <p:cNvPr id="4" name="Rectangle 3">
+              <a:extLst>
+                <a:ext uri="{FF2B5EF4-FFF2-40B4-BE49-F238E27FC236}">
+                  <a16:creationId xmlns:a16="http://schemas.microsoft.com/office/drawing/2014/main" id="{617419B0-E2E3-D669-26C5-CD0D903508CF}"/>
+                </a:ext>
+              </a:extLst>
+            </p:cNvPr>
+            <p:cNvSpPr/>
+            <p:nvPr/>
+          </p:nvSpPr>
+          <p:spPr>
+            <a:xfrm>
+              <a:off x="5749531" y="4201610"/>
+              <a:ext cx="2063380" cy="544010"/>
+            </a:xfrm>
+            <a:prstGeom prst="rect">
+              <a:avLst/>
+            </a:prstGeom>
+            <a:solidFill>
+              <a:schemeClr val="bg1"/>
+            </a:solidFill>
+            <a:ln>
+              <a:noFill/>
+            </a:ln>
+          </p:spPr>
+          <p:style>
+            <a:lnRef idx="2">
+              <a:schemeClr val="accent1">
+                <a:shade val="15000"/>
+              </a:schemeClr>
+            </a:lnRef>
+            <a:fillRef idx="1">
+              <a:schemeClr val="accent1"/>
+            </a:fillRef>
+            <a:effectRef idx="0">
+              <a:schemeClr val="accent1"/>
+            </a:effectRef>
+            <a:fontRef idx="minor">
+              <a:schemeClr val="lt1"/>
+            </a:fontRef>
+          </p:style>
+          <p:txBody>
+            <a:bodyPr rtlCol="0" anchor="ctr"/>
+            <a:lstStyle/>
+            <a:p>
+              <a:pPr algn="ctr"/>
+              <a:endParaRPr lang="en-US"/>
+            </a:p>
+          </p:txBody>
+        </p:sp>
+      </p:grpSp>
     </p:spTree>
     <p:extLst>
       <p:ext uri="{BB962C8B-B14F-4D97-AF65-F5344CB8AC3E}">
@@ -4553,7 +6354,7 @@
           <p:nvPr/>
         </p:nvPicPr>
         <p:blipFill>
-          <a:blip r:embed="rId2"/>
+          <a:blip r:embed="rId3"/>
           <a:srcRect b="49792"/>
           <a:stretch>
             <a:fillRect/>
@@ -4649,7 +6450,7 @@
           <p:nvPr/>
         </p:nvPicPr>
         <p:blipFill>
-          <a:blip r:embed="rId3"/>
+          <a:blip r:embed="rId4"/>
           <a:stretch>
             <a:fillRect/>
           </a:stretch>
@@ -4981,6 +6782,163 @@
 </file>
 
 <file path=ppt/slides/slide6.xml><?xml version="1.0" encoding="utf-8"?>
+<p:sld xmlns:a="http://schemas.openxmlformats.org/drawingml/2006/main" xmlns:r="http://schemas.openxmlformats.org/officeDocument/2006/relationships" xmlns:p="http://schemas.openxmlformats.org/presentationml/2006/main">
+  <p:cSld>
+    <p:spTree>
+      <p:nvGrpSpPr>
+        <p:cNvPr id="1" name=""/>
+        <p:cNvGrpSpPr/>
+        <p:nvPr/>
+      </p:nvGrpSpPr>
+      <p:grpSpPr>
+        <a:xfrm>
+          <a:off x="0" y="0"/>
+          <a:ext cx="0" cy="0"/>
+          <a:chOff x="0" y="0"/>
+          <a:chExt cx="0" cy="0"/>
+        </a:xfrm>
+      </p:grpSpPr>
+      <p:sp>
+        <p:nvSpPr>
+          <p:cNvPr id="2" name="Title 1">
+            <a:extLst>
+              <a:ext uri="{FF2B5EF4-FFF2-40B4-BE49-F238E27FC236}">
+                <a16:creationId xmlns:a16="http://schemas.microsoft.com/office/drawing/2014/main" id="{CC16800C-C98B-C081-5467-CB95B1E30776}"/>
+              </a:ext>
+            </a:extLst>
+          </p:cNvPr>
+          <p:cNvSpPr>
+            <a:spLocks noGrp="1"/>
+          </p:cNvSpPr>
+          <p:nvPr>
+            <p:ph type="title"/>
+          </p:nvPr>
+        </p:nvSpPr>
+        <p:spPr/>
+        <p:txBody>
+          <a:bodyPr/>
+          <a:lstStyle/>
+          <a:p>
+            <a:r>
+              <a:rPr lang="en-US" dirty="0"/>
+              <a:t>How do we send rays?</a:t>
+            </a:r>
+          </a:p>
+        </p:txBody>
+      </p:sp>
+      <p:sp>
+        <p:nvSpPr>
+          <p:cNvPr id="3" name="Content Placeholder 2">
+            <a:extLst>
+              <a:ext uri="{FF2B5EF4-FFF2-40B4-BE49-F238E27FC236}">
+                <a16:creationId xmlns:a16="http://schemas.microsoft.com/office/drawing/2014/main" id="{3ED3E5D8-77AA-E42F-1D0F-50128F4086D8}"/>
+              </a:ext>
+            </a:extLst>
+          </p:cNvPr>
+          <p:cNvSpPr>
+            <a:spLocks noGrp="1"/>
+          </p:cNvSpPr>
+          <p:nvPr>
+            <p:ph idx="1"/>
+          </p:nvPr>
+        </p:nvSpPr>
+        <p:spPr>
+          <a:xfrm>
+            <a:off x="838200" y="1825625"/>
+            <a:ext cx="10515600" cy="2171700"/>
+          </a:xfrm>
+        </p:spPr>
+        <p:txBody>
+          <a:bodyPr/>
+          <a:lstStyle/>
+          <a:p>
+            <a:r>
+              <a:rPr lang="en-US" dirty="0"/>
+              <a:t>Limit the angles each pixel can accept</a:t>
+            </a:r>
+          </a:p>
+          <a:p>
+            <a:r>
+              <a:rPr lang="en-US" dirty="0"/>
+              <a:t>Rays start at the camera center and travel out through the viewport</a:t>
+            </a:r>
+          </a:p>
+        </p:txBody>
+      </p:sp>
+      <p:pic>
+        <p:nvPicPr>
+          <p:cNvPr id="4" name="Picture 3" descr="Photorealistic Rendering and the Ray-Tracing Algorithm">
+            <a:extLst>
+              <a:ext uri="{FF2B5EF4-FFF2-40B4-BE49-F238E27FC236}">
+                <a16:creationId xmlns:a16="http://schemas.microsoft.com/office/drawing/2014/main" id="{D6C02555-0508-B938-1EA8-5C578F491037}"/>
+              </a:ext>
+            </a:extLst>
+          </p:cNvPr>
+          <p:cNvPicPr>
+            <a:picLocks noChangeAspect="1"/>
+          </p:cNvPicPr>
+          <p:nvPr/>
+        </p:nvPicPr>
+        <p:blipFill>
+          <a:blip r:embed="rId3"/>
+          <a:stretch>
+            <a:fillRect/>
+          </a:stretch>
+        </p:blipFill>
+        <p:spPr>
+          <a:xfrm>
+            <a:off x="569595" y="4209288"/>
+            <a:ext cx="7029450" cy="2171700"/>
+          </a:xfrm>
+          <a:prstGeom prst="rect">
+            <a:avLst/>
+          </a:prstGeom>
+        </p:spPr>
+      </p:pic>
+      <p:pic>
+        <p:nvPicPr>
+          <p:cNvPr id="5" name="Picture 4">
+            <a:extLst>
+              <a:ext uri="{FF2B5EF4-FFF2-40B4-BE49-F238E27FC236}">
+                <a16:creationId xmlns:a16="http://schemas.microsoft.com/office/drawing/2014/main" id="{D2484360-B6A6-B571-9A24-FE22E92922B1}"/>
+              </a:ext>
+            </a:extLst>
+          </p:cNvPr>
+          <p:cNvPicPr>
+            <a:picLocks noChangeAspect="1"/>
+          </p:cNvPicPr>
+          <p:nvPr/>
+        </p:nvPicPr>
+        <p:blipFill>
+          <a:blip r:embed="rId4"/>
+          <a:stretch>
+            <a:fillRect/>
+          </a:stretch>
+        </p:blipFill>
+        <p:spPr>
+          <a:xfrm>
+            <a:off x="7932304" y="3355848"/>
+            <a:ext cx="3510023" cy="2772918"/>
+          </a:xfrm>
+          <a:prstGeom prst="rect">
+            <a:avLst/>
+          </a:prstGeom>
+        </p:spPr>
+      </p:pic>
+    </p:spTree>
+    <p:extLst>
+      <p:ext uri="{BB962C8B-B14F-4D97-AF65-F5344CB8AC3E}">
+        <p14:creationId xmlns:p14="http://schemas.microsoft.com/office/powerpoint/2010/main" val="4000838766"/>
+      </p:ext>
+    </p:extLst>
+  </p:cSld>
+  <p:clrMapOvr>
+    <a:masterClrMapping/>
+  </p:clrMapOvr>
+</p:sld>
+</file>
+
+<file path=ppt/slides/slide7.xml><?xml version="1.0" encoding="utf-8"?>
 <p:sld xmlns:a="http://schemas.openxmlformats.org/drawingml/2006/main" xmlns:r="http://schemas.openxmlformats.org/officeDocument/2006/relationships" xmlns:p="http://schemas.openxmlformats.org/presentationml/2006/main">
   <p:cSld>
     <p:spTree>
@@ -5312,93 +7270,6 @@
 </p:sld>
 </file>
 
-<file path=ppt/slides/slide7.xml><?xml version="1.0" encoding="utf-8"?>
-<p:sld xmlns:a="http://schemas.openxmlformats.org/drawingml/2006/main" xmlns:r="http://schemas.openxmlformats.org/officeDocument/2006/relationships" xmlns:p="http://schemas.openxmlformats.org/presentationml/2006/main">
-  <p:cSld>
-    <p:spTree>
-      <p:nvGrpSpPr>
-        <p:cNvPr id="1" name=""/>
-        <p:cNvGrpSpPr/>
-        <p:nvPr/>
-      </p:nvGrpSpPr>
-      <p:grpSpPr>
-        <a:xfrm>
-          <a:off x="0" y="0"/>
-          <a:ext cx="0" cy="0"/>
-          <a:chOff x="0" y="0"/>
-          <a:chExt cx="0" cy="0"/>
-        </a:xfrm>
-      </p:grpSpPr>
-      <p:sp>
-        <p:nvSpPr>
-          <p:cNvPr id="2" name="Title 1">
-            <a:extLst>
-              <a:ext uri="{FF2B5EF4-FFF2-40B4-BE49-F238E27FC236}">
-                <a16:creationId xmlns:a16="http://schemas.microsoft.com/office/drawing/2014/main" id="{526ABCF2-B221-B02B-594D-8E5C38935006}"/>
-              </a:ext>
-            </a:extLst>
-          </p:cNvPr>
-          <p:cNvSpPr>
-            <a:spLocks noGrp="1"/>
-          </p:cNvSpPr>
-          <p:nvPr>
-            <p:ph type="title"/>
-          </p:nvPr>
-        </p:nvSpPr>
-        <p:spPr/>
-        <p:txBody>
-          <a:bodyPr/>
-          <a:lstStyle/>
-          <a:p>
-            <a:r>
-              <a:rPr lang="en-US" dirty="0"/>
-              <a:t>Ray – Sphere intersection</a:t>
-            </a:r>
-          </a:p>
-        </p:txBody>
-      </p:sp>
-      <p:sp>
-        <p:nvSpPr>
-          <p:cNvPr id="3" name="Content Placeholder 2">
-            <a:extLst>
-              <a:ext uri="{FF2B5EF4-FFF2-40B4-BE49-F238E27FC236}">
-                <a16:creationId xmlns:a16="http://schemas.microsoft.com/office/drawing/2014/main" id="{5EEC383C-0DF0-4681-7B7C-88F1A943357A}"/>
-              </a:ext>
-            </a:extLst>
-          </p:cNvPr>
-          <p:cNvSpPr>
-            <a:spLocks noGrp="1"/>
-          </p:cNvSpPr>
-          <p:nvPr>
-            <p:ph idx="1"/>
-          </p:nvPr>
-        </p:nvSpPr>
-        <p:spPr/>
-        <p:txBody>
-          <a:bodyPr/>
-          <a:lstStyle/>
-          <a:p>
-            <a:r>
-              <a:rPr lang="en-US" dirty="0" err="1"/>
-              <a:t>todo</a:t>
-            </a:r>
-            <a:endParaRPr lang="en-US" dirty="0"/>
-          </a:p>
-        </p:txBody>
-      </p:sp>
-    </p:spTree>
-    <p:extLst>
-      <p:ext uri="{BB962C8B-B14F-4D97-AF65-F5344CB8AC3E}">
-        <p14:creationId xmlns:p14="http://schemas.microsoft.com/office/powerpoint/2010/main" val="2413106270"/>
-      </p:ext>
-    </p:extLst>
-  </p:cSld>
-  <p:clrMapOvr>
-    <a:masterClrMapping/>
-  </p:clrMapOvr>
-</p:sld>
-</file>
-
 <file path=ppt/slides/slide8.xml><?xml version="1.0" encoding="utf-8"?>
 <p:sld xmlns:a="http://schemas.openxmlformats.org/drawingml/2006/main" xmlns:r="http://schemas.openxmlformats.org/officeDocument/2006/relationships" xmlns:p="http://schemas.openxmlformats.org/presentationml/2006/main">
   <p:cSld>
@@ -5421,7 +7292,7 @@
           <p:cNvPr id="2" name="Title 1">
             <a:extLst>
               <a:ext uri="{FF2B5EF4-FFF2-40B4-BE49-F238E27FC236}">
-                <a16:creationId xmlns:a16="http://schemas.microsoft.com/office/drawing/2014/main" id="{61C8FF5C-3027-9A43-FC65-C00577719BEF}"/>
+                <a16:creationId xmlns:a16="http://schemas.microsoft.com/office/drawing/2014/main" id="{526ABCF2-B221-B02B-594D-8E5C38935006}"/>
               </a:ext>
             </a:extLst>
           </p:cNvPr>
@@ -5439,73 +7310,1428 @@
           <a:p>
             <a:r>
               <a:rPr lang="en-US" dirty="0"/>
-              <a:t>Ray scattering</a:t>
-            </a:r>
-          </a:p>
-        </p:txBody>
-      </p:sp>
-      <p:sp>
-        <p:nvSpPr>
-          <p:cNvPr id="3" name="Content Placeholder 2">
-            <a:extLst>
-              <a:ext uri="{FF2B5EF4-FFF2-40B4-BE49-F238E27FC236}">
-                <a16:creationId xmlns:a16="http://schemas.microsoft.com/office/drawing/2014/main" id="{5AE6B0D2-5C5E-6727-CBFD-96A3E7FB25E5}"/>
-              </a:ext>
-            </a:extLst>
-          </p:cNvPr>
-          <p:cNvSpPr>
-            <a:spLocks noGrp="1"/>
-          </p:cNvSpPr>
-          <p:nvPr>
-            <p:ph idx="1"/>
-          </p:nvPr>
-        </p:nvSpPr>
-        <p:spPr/>
-        <p:txBody>
-          <a:bodyPr/>
-          <a:lstStyle/>
-          <a:p>
-            <a:r>
-              <a:rPr lang="en-US" dirty="0"/>
-              <a:t>After a ray hits a surface, we need to scatter it</a:t>
-            </a:r>
-          </a:p>
-          <a:p>
-            <a:r>
-              <a:rPr lang="en-US" dirty="0"/>
-              <a:t>Influences the material properties of the surface</a:t>
-            </a:r>
-          </a:p>
-          <a:p>
-            <a:r>
-              <a:rPr lang="en-US" dirty="0"/>
-              <a:t>Diffuse scattering</a:t>
-            </a:r>
-          </a:p>
-          <a:p>
-            <a:r>
-              <a:rPr lang="en-US" dirty="0"/>
-              <a:t>Lambertian scattering</a:t>
-            </a:r>
-          </a:p>
-          <a:p>
-            <a:r>
-              <a:rPr lang="en-US" dirty="0"/>
-              <a:t>Reflective scattering</a:t>
-            </a:r>
-          </a:p>
-          <a:p>
-            <a:r>
-              <a:rPr lang="en-US" dirty="0"/>
-              <a:t>Dielectric scattering (next week)</a:t>
-            </a:r>
-          </a:p>
-        </p:txBody>
-      </p:sp>
+              <a:t>Ray – Sphere intersection</a:t>
+            </a:r>
+          </a:p>
+        </p:txBody>
+      </p:sp>
+      <mc:AlternateContent xmlns:mc="http://schemas.openxmlformats.org/markup-compatibility/2006" xmlns:a14="http://schemas.microsoft.com/office/drawing/2010/main">
+        <mc:Choice Requires="a14">
+          <p:sp>
+            <p:nvSpPr>
+              <p:cNvPr id="3" name="Content Placeholder 2">
+                <a:extLst>
+                  <a:ext uri="{FF2B5EF4-FFF2-40B4-BE49-F238E27FC236}">
+                    <a16:creationId xmlns:a16="http://schemas.microsoft.com/office/drawing/2014/main" id="{5EEC383C-0DF0-4681-7B7C-88F1A943357A}"/>
+                  </a:ext>
+                </a:extLst>
+              </p:cNvPr>
+              <p:cNvSpPr>
+                <a:spLocks noGrp="1"/>
+              </p:cNvSpPr>
+              <p:nvPr>
+                <p:ph idx="1"/>
+              </p:nvPr>
+            </p:nvSpPr>
+            <p:spPr/>
+            <p:txBody>
+              <a:bodyPr>
+                <a:normAutofit fontScale="92500"/>
+              </a:bodyPr>
+              <a:lstStyle/>
+              <a:p>
+                <a:pPr marL="0" indent="0">
+                  <a:lnSpc>
+                    <a:spcPct val="140000"/>
+                  </a:lnSpc>
+                  <a:buNone/>
+                </a:pPr>
+                <a14:m>
+                  <m:oMathPara xmlns:m="http://schemas.openxmlformats.org/officeDocument/2006/math">
+                    <m:oMath>
+                      <m:sSup>
+                        <m:sSupPr>
+                          <m:ctrlPr>
+                            <a:rPr lang="en-US" i="1">
+                              <a:latin typeface="Cambria Math" panose="02040503050406030204" pitchFamily="18" charset="0"/>
+                            </a:rPr>
+                          </m:ctrlPr>
+                        </m:sSupPr>
+                        <m:e>
+                          <m:d>
+                            <m:dPr>
+                              <m:begChr m:val="‖"/>
+                              <m:endChr m:val="‖"/>
+                              <m:ctrlPr>
+                                <a:rPr lang="en-US" i="1">
+                                  <a:latin typeface="Cambria Math" panose="02040503050406030204" pitchFamily="18" charset="0"/>
+                                </a:rPr>
+                              </m:ctrlPr>
+                            </m:dPr>
+                            <m:e>
+                              <m:r>
+                                <a:rPr lang="en-US" i="1">
+                                  <a:latin typeface="Cambria Math" panose="02040503050406030204" pitchFamily="18" charset="0"/>
+                                </a:rPr>
+                                <m:t>(</m:t>
+                              </m:r>
+                              <m:r>
+                                <a:rPr lang="en-US" i="1">
+                                  <a:latin typeface="Cambria Math" panose="02040503050406030204" pitchFamily="18" charset="0"/>
+                                </a:rPr>
+                                <m:t>𝑃</m:t>
+                              </m:r>
+                              <m:r>
+                                <a:rPr lang="en-US" i="1">
+                                  <a:latin typeface="Cambria Math" panose="02040503050406030204" pitchFamily="18" charset="0"/>
+                                </a:rPr>
+                                <m:t>−</m:t>
+                              </m:r>
+                              <m:r>
+                                <a:rPr lang="en-US" i="1">
+                                  <a:latin typeface="Cambria Math" panose="02040503050406030204" pitchFamily="18" charset="0"/>
+                                </a:rPr>
+                                <m:t>𝐶</m:t>
+                              </m:r>
+                              <m:r>
+                                <a:rPr lang="en-US" i="1">
+                                  <a:latin typeface="Cambria Math" panose="02040503050406030204" pitchFamily="18" charset="0"/>
+                                </a:rPr>
+                                <m:t>)</m:t>
+                              </m:r>
+                            </m:e>
+                          </m:d>
+                        </m:e>
+                        <m:sup>
+                          <m:r>
+                            <a:rPr lang="en-US" b="0" i="1" smtClean="0">
+                              <a:latin typeface="Cambria Math" panose="02040503050406030204" pitchFamily="18" charset="0"/>
+                            </a:rPr>
+                            <m:t>2</m:t>
+                          </m:r>
+                        </m:sup>
+                      </m:sSup>
+                      <m:r>
+                        <a:rPr lang="en-US" b="0" i="1" smtClean="0">
+                          <a:latin typeface="Cambria Math" panose="02040503050406030204" pitchFamily="18" charset="0"/>
+                        </a:rPr>
+                        <m:t>=</m:t>
+                      </m:r>
+                      <m:sSup>
+                        <m:sSupPr>
+                          <m:ctrlPr>
+                            <a:rPr lang="en-US" b="0" i="1" smtClean="0">
+                              <a:latin typeface="Cambria Math" panose="02040503050406030204" pitchFamily="18" charset="0"/>
+                            </a:rPr>
+                          </m:ctrlPr>
+                        </m:sSupPr>
+                        <m:e>
+                          <m:r>
+                            <a:rPr lang="en-US" b="0" i="1" smtClean="0">
+                              <a:latin typeface="Cambria Math" panose="02040503050406030204" pitchFamily="18" charset="0"/>
+                            </a:rPr>
+                            <m:t>𝑟</m:t>
+                          </m:r>
+                        </m:e>
+                        <m:sup>
+                          <m:r>
+                            <a:rPr lang="en-US" b="0" i="1" smtClean="0">
+                              <a:latin typeface="Cambria Math" panose="02040503050406030204" pitchFamily="18" charset="0"/>
+                            </a:rPr>
+                            <m:t>2</m:t>
+                          </m:r>
+                        </m:sup>
+                      </m:sSup>
+                    </m:oMath>
+                  </m:oMathPara>
+                </a14:m>
+                <a:endParaRPr lang="en-US" dirty="0"/>
+              </a:p>
+              <a:p>
+                <a:pPr marL="0" indent="0">
+                  <a:lnSpc>
+                    <a:spcPct val="140000"/>
+                  </a:lnSpc>
+                  <a:buNone/>
+                </a:pPr>
+                <a14:m>
+                  <m:oMathPara xmlns:m="http://schemas.openxmlformats.org/officeDocument/2006/math">
+                    <m:oMath>
+                      <m:sSup>
+                        <m:sSupPr>
+                          <m:ctrlPr>
+                            <a:rPr lang="en-US" b="0" i="1" smtClean="0">
+                              <a:latin typeface="Cambria Math" panose="02040503050406030204" pitchFamily="18" charset="0"/>
+                            </a:rPr>
+                          </m:ctrlPr>
+                        </m:sSupPr>
+                        <m:e>
+                          <m:d>
+                            <m:dPr>
+                              <m:begChr m:val="‖"/>
+                              <m:endChr m:val="‖"/>
+                              <m:ctrlPr>
+                                <a:rPr lang="en-US" b="0" i="1" smtClean="0">
+                                  <a:latin typeface="Cambria Math" panose="02040503050406030204" pitchFamily="18" charset="0"/>
+                                </a:rPr>
+                              </m:ctrlPr>
+                            </m:dPr>
+                            <m:e>
+                              <m:d>
+                                <m:dPr>
+                                  <m:ctrlPr>
+                                    <a:rPr lang="en-US" b="0" i="1" smtClean="0">
+                                      <a:latin typeface="Cambria Math" panose="02040503050406030204" pitchFamily="18" charset="0"/>
+                                    </a:rPr>
+                                  </m:ctrlPr>
+                                </m:dPr>
+                                <m:e>
+                                  <m:r>
+                                    <a:rPr lang="en-US" b="0" i="1" smtClean="0">
+                                      <a:latin typeface="Cambria Math" panose="02040503050406030204" pitchFamily="18" charset="0"/>
+                                    </a:rPr>
+                                    <m:t>𝑂</m:t>
+                                  </m:r>
+                                  <m:r>
+                                    <a:rPr lang="en-US" b="0" i="1" smtClean="0">
+                                      <a:latin typeface="Cambria Math" panose="02040503050406030204" pitchFamily="18" charset="0"/>
+                                    </a:rPr>
+                                    <m:t>+</m:t>
+                                  </m:r>
+                                  <m:r>
+                                    <a:rPr lang="en-US" b="0" i="1" smtClean="0">
+                                      <a:latin typeface="Cambria Math" panose="02040503050406030204" pitchFamily="18" charset="0"/>
+                                    </a:rPr>
+                                    <m:t>𝑡</m:t>
+                                  </m:r>
+                                  <m:acc>
+                                    <m:accPr>
+                                      <m:chr m:val="⃗"/>
+                                      <m:ctrlPr>
+                                        <a:rPr lang="en-US" b="0" i="1" smtClean="0">
+                                          <a:latin typeface="Cambria Math" panose="02040503050406030204" pitchFamily="18" charset="0"/>
+                                        </a:rPr>
+                                      </m:ctrlPr>
+                                    </m:accPr>
+                                    <m:e>
+                                      <m:r>
+                                        <a:rPr lang="en-US" b="0" i="1" smtClean="0">
+                                          <a:latin typeface="Cambria Math" panose="02040503050406030204" pitchFamily="18" charset="0"/>
+                                        </a:rPr>
+                                        <m:t>𝑑</m:t>
+                                      </m:r>
+                                    </m:e>
+                                  </m:acc>
+                                </m:e>
+                              </m:d>
+                              <m:r>
+                                <a:rPr lang="en-US" b="0" i="1" smtClean="0">
+                                  <a:latin typeface="Cambria Math" panose="02040503050406030204" pitchFamily="18" charset="0"/>
+                                </a:rPr>
+                                <m:t>−</m:t>
+                              </m:r>
+                              <m:r>
+                                <a:rPr lang="en-US" b="0" i="1" smtClean="0">
+                                  <a:latin typeface="Cambria Math" panose="02040503050406030204" pitchFamily="18" charset="0"/>
+                                </a:rPr>
+                                <m:t>𝐶</m:t>
+                              </m:r>
+                            </m:e>
+                          </m:d>
+                        </m:e>
+                        <m:sup>
+                          <m:r>
+                            <a:rPr lang="en-US" b="0" i="1" smtClean="0">
+                              <a:latin typeface="Cambria Math" panose="02040503050406030204" pitchFamily="18" charset="0"/>
+                            </a:rPr>
+                            <m:t>2</m:t>
+                          </m:r>
+                        </m:sup>
+                      </m:sSup>
+                      <m:r>
+                        <a:rPr lang="en-US" b="0" i="1" smtClean="0">
+                          <a:latin typeface="Cambria Math" panose="02040503050406030204" pitchFamily="18" charset="0"/>
+                        </a:rPr>
+                        <m:t>=</m:t>
+                      </m:r>
+                      <m:sSup>
+                        <m:sSupPr>
+                          <m:ctrlPr>
+                            <a:rPr lang="en-US" b="0" i="1" smtClean="0">
+                              <a:latin typeface="Cambria Math" panose="02040503050406030204" pitchFamily="18" charset="0"/>
+                            </a:rPr>
+                          </m:ctrlPr>
+                        </m:sSupPr>
+                        <m:e>
+                          <m:r>
+                            <a:rPr lang="en-US" b="0" i="1" smtClean="0">
+                              <a:latin typeface="Cambria Math" panose="02040503050406030204" pitchFamily="18" charset="0"/>
+                            </a:rPr>
+                            <m:t>𝑟</m:t>
+                          </m:r>
+                        </m:e>
+                        <m:sup>
+                          <m:r>
+                            <a:rPr lang="en-US" b="0" i="1" smtClean="0">
+                              <a:latin typeface="Cambria Math" panose="02040503050406030204" pitchFamily="18" charset="0"/>
+                            </a:rPr>
+                            <m:t>2</m:t>
+                          </m:r>
+                        </m:sup>
+                      </m:sSup>
+                    </m:oMath>
+                  </m:oMathPara>
+                </a14:m>
+                <a:endParaRPr lang="en-US" dirty="0"/>
+              </a:p>
+              <a:p>
+                <a:pPr marL="0" indent="0">
+                  <a:lnSpc>
+                    <a:spcPct val="140000"/>
+                  </a:lnSpc>
+                  <a:buNone/>
+                </a:pPr>
+                <a14:m>
+                  <m:oMathPara xmlns:m="http://schemas.openxmlformats.org/officeDocument/2006/math">
+                    <m:oMath>
+                      <m:d>
+                        <m:dPr>
+                          <m:ctrlPr>
+                            <a:rPr lang="en-US" b="0" i="1" smtClean="0">
+                              <a:latin typeface="Cambria Math" panose="02040503050406030204" pitchFamily="18" charset="0"/>
+                            </a:rPr>
+                          </m:ctrlPr>
+                        </m:dPr>
+                        <m:e>
+                          <m:r>
+                            <a:rPr lang="en-US" b="0" i="1" smtClean="0">
+                              <a:latin typeface="Cambria Math" panose="02040503050406030204" pitchFamily="18" charset="0"/>
+                            </a:rPr>
+                            <m:t>𝑡</m:t>
+                          </m:r>
+                          <m:acc>
+                            <m:accPr>
+                              <m:chr m:val="⃗"/>
+                              <m:ctrlPr>
+                                <a:rPr lang="en-US" b="0" i="1" smtClean="0">
+                                  <a:latin typeface="Cambria Math" panose="02040503050406030204" pitchFamily="18" charset="0"/>
+                                </a:rPr>
+                              </m:ctrlPr>
+                            </m:accPr>
+                            <m:e>
+                              <m:r>
+                                <a:rPr lang="en-US" b="0" i="1" smtClean="0">
+                                  <a:latin typeface="Cambria Math" panose="02040503050406030204" pitchFamily="18" charset="0"/>
+                                </a:rPr>
+                                <m:t>𝑑</m:t>
+                              </m:r>
+                            </m:e>
+                          </m:acc>
+                          <m:r>
+                            <a:rPr lang="en-US" b="0" i="1" smtClean="0">
+                              <a:latin typeface="Cambria Math" panose="02040503050406030204" pitchFamily="18" charset="0"/>
+                            </a:rPr>
+                            <m:t>+(</m:t>
+                          </m:r>
+                          <m:r>
+                            <a:rPr lang="en-US" b="0" i="1" smtClean="0">
+                              <a:latin typeface="Cambria Math" panose="02040503050406030204" pitchFamily="18" charset="0"/>
+                            </a:rPr>
+                            <m:t>𝑂</m:t>
+                          </m:r>
+                          <m:r>
+                            <a:rPr lang="en-US" b="0" i="1" smtClean="0">
+                              <a:latin typeface="Cambria Math" panose="02040503050406030204" pitchFamily="18" charset="0"/>
+                            </a:rPr>
+                            <m:t>−</m:t>
+                          </m:r>
+                          <m:r>
+                            <a:rPr lang="en-US" b="0" i="1" smtClean="0">
+                              <a:latin typeface="Cambria Math" panose="02040503050406030204" pitchFamily="18" charset="0"/>
+                            </a:rPr>
+                            <m:t>𝐶</m:t>
+                          </m:r>
+                          <m:r>
+                            <a:rPr lang="en-US" b="0" i="1" smtClean="0">
+                              <a:latin typeface="Cambria Math" panose="02040503050406030204" pitchFamily="18" charset="0"/>
+                            </a:rPr>
+                            <m:t>)</m:t>
+                          </m:r>
+                        </m:e>
+                      </m:d>
+                      <m:r>
+                        <a:rPr lang="en-US" b="0" i="1" smtClean="0">
+                          <a:latin typeface="Cambria Math" panose="02040503050406030204" pitchFamily="18" charset="0"/>
+                          <a:ea typeface="Cambria Math" panose="02040503050406030204" pitchFamily="18" charset="0"/>
+                        </a:rPr>
+                        <m:t>∙</m:t>
+                      </m:r>
+                      <m:d>
+                        <m:dPr>
+                          <m:ctrlPr>
+                            <a:rPr lang="en-US" b="0" i="1" smtClean="0">
+                              <a:latin typeface="Cambria Math" panose="02040503050406030204" pitchFamily="18" charset="0"/>
+                              <a:ea typeface="Cambria Math" panose="02040503050406030204" pitchFamily="18" charset="0"/>
+                            </a:rPr>
+                          </m:ctrlPr>
+                        </m:dPr>
+                        <m:e>
+                          <m:r>
+                            <a:rPr lang="en-US" b="0" i="1" smtClean="0">
+                              <a:latin typeface="Cambria Math" panose="02040503050406030204" pitchFamily="18" charset="0"/>
+                              <a:ea typeface="Cambria Math" panose="02040503050406030204" pitchFamily="18" charset="0"/>
+                            </a:rPr>
+                            <m:t>𝑡</m:t>
+                          </m:r>
+                          <m:acc>
+                            <m:accPr>
+                              <m:chr m:val="⃗"/>
+                              <m:ctrlPr>
+                                <a:rPr lang="en-US" b="0" i="1" smtClean="0">
+                                  <a:latin typeface="Cambria Math" panose="02040503050406030204" pitchFamily="18" charset="0"/>
+                                  <a:ea typeface="Cambria Math" panose="02040503050406030204" pitchFamily="18" charset="0"/>
+                                </a:rPr>
+                              </m:ctrlPr>
+                            </m:accPr>
+                            <m:e>
+                              <m:r>
+                                <a:rPr lang="en-US" b="0" i="1" smtClean="0">
+                                  <a:latin typeface="Cambria Math" panose="02040503050406030204" pitchFamily="18" charset="0"/>
+                                  <a:ea typeface="Cambria Math" panose="02040503050406030204" pitchFamily="18" charset="0"/>
+                                </a:rPr>
+                                <m:t>𝑑</m:t>
+                              </m:r>
+                            </m:e>
+                          </m:acc>
+                          <m:r>
+                            <a:rPr lang="en-US" b="0" i="1" smtClean="0">
+                              <a:latin typeface="Cambria Math" panose="02040503050406030204" pitchFamily="18" charset="0"/>
+                              <a:ea typeface="Cambria Math" panose="02040503050406030204" pitchFamily="18" charset="0"/>
+                            </a:rPr>
+                            <m:t>+(</m:t>
+                          </m:r>
+                          <m:r>
+                            <a:rPr lang="en-US" b="0" i="1" smtClean="0">
+                              <a:latin typeface="Cambria Math" panose="02040503050406030204" pitchFamily="18" charset="0"/>
+                              <a:ea typeface="Cambria Math" panose="02040503050406030204" pitchFamily="18" charset="0"/>
+                            </a:rPr>
+                            <m:t>𝑂</m:t>
+                          </m:r>
+                          <m:r>
+                            <a:rPr lang="en-US" b="0" i="1" smtClean="0">
+                              <a:latin typeface="Cambria Math" panose="02040503050406030204" pitchFamily="18" charset="0"/>
+                              <a:ea typeface="Cambria Math" panose="02040503050406030204" pitchFamily="18" charset="0"/>
+                            </a:rPr>
+                            <m:t>−</m:t>
+                          </m:r>
+                          <m:r>
+                            <a:rPr lang="en-US" b="0" i="1" smtClean="0">
+                              <a:latin typeface="Cambria Math" panose="02040503050406030204" pitchFamily="18" charset="0"/>
+                              <a:ea typeface="Cambria Math" panose="02040503050406030204" pitchFamily="18" charset="0"/>
+                            </a:rPr>
+                            <m:t>𝐶</m:t>
+                          </m:r>
+                          <m:r>
+                            <a:rPr lang="en-US" b="0" i="1" smtClean="0">
+                              <a:latin typeface="Cambria Math" panose="02040503050406030204" pitchFamily="18" charset="0"/>
+                              <a:ea typeface="Cambria Math" panose="02040503050406030204" pitchFamily="18" charset="0"/>
+                            </a:rPr>
+                            <m:t>)</m:t>
+                          </m:r>
+                        </m:e>
+                      </m:d>
+                      <m:r>
+                        <a:rPr lang="en-US" b="0" i="1" smtClean="0">
+                          <a:latin typeface="Cambria Math" panose="02040503050406030204" pitchFamily="18" charset="0"/>
+                          <a:ea typeface="Cambria Math" panose="02040503050406030204" pitchFamily="18" charset="0"/>
+                        </a:rPr>
+                        <m:t>=</m:t>
+                      </m:r>
+                      <m:sSup>
+                        <m:sSupPr>
+                          <m:ctrlPr>
+                            <a:rPr lang="en-US" b="0" i="1" smtClean="0">
+                              <a:latin typeface="Cambria Math" panose="02040503050406030204" pitchFamily="18" charset="0"/>
+                              <a:ea typeface="Cambria Math" panose="02040503050406030204" pitchFamily="18" charset="0"/>
+                            </a:rPr>
+                          </m:ctrlPr>
+                        </m:sSupPr>
+                        <m:e>
+                          <m:r>
+                            <a:rPr lang="en-US" b="0" i="1" smtClean="0">
+                              <a:latin typeface="Cambria Math" panose="02040503050406030204" pitchFamily="18" charset="0"/>
+                              <a:ea typeface="Cambria Math" panose="02040503050406030204" pitchFamily="18" charset="0"/>
+                            </a:rPr>
+                            <m:t>𝑟</m:t>
+                          </m:r>
+                        </m:e>
+                        <m:sup>
+                          <m:r>
+                            <a:rPr lang="en-US" b="0" i="1" smtClean="0">
+                              <a:latin typeface="Cambria Math" panose="02040503050406030204" pitchFamily="18" charset="0"/>
+                              <a:ea typeface="Cambria Math" panose="02040503050406030204" pitchFamily="18" charset="0"/>
+                            </a:rPr>
+                            <m:t>2</m:t>
+                          </m:r>
+                        </m:sup>
+                      </m:sSup>
+                    </m:oMath>
+                  </m:oMathPara>
+                </a14:m>
+                <a:endParaRPr lang="en-US" dirty="0"/>
+              </a:p>
+              <a:p>
+                <a:pPr marL="0" indent="0">
+                  <a:lnSpc>
+                    <a:spcPct val="140000"/>
+                  </a:lnSpc>
+                  <a:buNone/>
+                </a:pPr>
+                <a14:m>
+                  <m:oMathPara xmlns:m="http://schemas.openxmlformats.org/officeDocument/2006/math">
+                    <m:oMath>
+                      <m:sSup>
+                        <m:sSupPr>
+                          <m:ctrlPr>
+                            <a:rPr lang="en-US" b="0" i="1" smtClean="0">
+                              <a:latin typeface="Cambria Math" panose="02040503050406030204" pitchFamily="18" charset="0"/>
+                            </a:rPr>
+                          </m:ctrlPr>
+                        </m:sSupPr>
+                        <m:e>
+                          <m:r>
+                            <a:rPr lang="en-US" b="0" i="1" smtClean="0">
+                              <a:latin typeface="Cambria Math" panose="02040503050406030204" pitchFamily="18" charset="0"/>
+                            </a:rPr>
+                            <m:t>𝑡</m:t>
+                          </m:r>
+                        </m:e>
+                        <m:sup>
+                          <m:r>
+                            <a:rPr lang="en-US" b="0" i="1" smtClean="0">
+                              <a:latin typeface="Cambria Math" panose="02040503050406030204" pitchFamily="18" charset="0"/>
+                            </a:rPr>
+                            <m:t>2</m:t>
+                          </m:r>
+                        </m:sup>
+                      </m:sSup>
+                      <m:d>
+                        <m:dPr>
+                          <m:ctrlPr>
+                            <a:rPr lang="en-US" b="0" i="1" smtClean="0">
+                              <a:latin typeface="Cambria Math" panose="02040503050406030204" pitchFamily="18" charset="0"/>
+                            </a:rPr>
+                          </m:ctrlPr>
+                        </m:dPr>
+                        <m:e>
+                          <m:acc>
+                            <m:accPr>
+                              <m:chr m:val="⃗"/>
+                              <m:ctrlPr>
+                                <a:rPr lang="en-US" b="0" i="1" smtClean="0">
+                                  <a:latin typeface="Cambria Math" panose="02040503050406030204" pitchFamily="18" charset="0"/>
+                                </a:rPr>
+                              </m:ctrlPr>
+                            </m:accPr>
+                            <m:e>
+                              <m:r>
+                                <a:rPr lang="en-US" b="0" i="1" smtClean="0">
+                                  <a:latin typeface="Cambria Math" panose="02040503050406030204" pitchFamily="18" charset="0"/>
+                                </a:rPr>
+                                <m:t>𝑑</m:t>
+                              </m:r>
+                            </m:e>
+                          </m:acc>
+                          <m:r>
+                            <a:rPr lang="en-US" i="1">
+                              <a:latin typeface="Cambria Math" panose="02040503050406030204" pitchFamily="18" charset="0"/>
+                              <a:ea typeface="Cambria Math" panose="02040503050406030204" pitchFamily="18" charset="0"/>
+                            </a:rPr>
+                            <m:t>∙</m:t>
+                          </m:r>
+                          <m:acc>
+                            <m:accPr>
+                              <m:chr m:val="⃗"/>
+                              <m:ctrlPr>
+                                <a:rPr lang="en-US" b="0" i="1" smtClean="0">
+                                  <a:latin typeface="Cambria Math" panose="02040503050406030204" pitchFamily="18" charset="0"/>
+                                  <a:ea typeface="Cambria Math" panose="02040503050406030204" pitchFamily="18" charset="0"/>
+                                </a:rPr>
+                              </m:ctrlPr>
+                            </m:accPr>
+                            <m:e>
+                              <m:r>
+                                <a:rPr lang="en-US" b="0" i="1" smtClean="0">
+                                  <a:latin typeface="Cambria Math" panose="02040503050406030204" pitchFamily="18" charset="0"/>
+                                  <a:ea typeface="Cambria Math" panose="02040503050406030204" pitchFamily="18" charset="0"/>
+                                </a:rPr>
+                                <m:t>𝑑</m:t>
+                              </m:r>
+                            </m:e>
+                          </m:acc>
+                        </m:e>
+                      </m:d>
+                      <m:r>
+                        <a:rPr lang="en-US" b="0" i="1" smtClean="0">
+                          <a:latin typeface="Cambria Math" panose="02040503050406030204" pitchFamily="18" charset="0"/>
+                          <a:ea typeface="Cambria Math" panose="02040503050406030204" pitchFamily="18" charset="0"/>
+                        </a:rPr>
+                        <m:t>+2</m:t>
+                      </m:r>
+                      <m:r>
+                        <a:rPr lang="en-US" b="0" i="1" smtClean="0">
+                          <a:latin typeface="Cambria Math" panose="02040503050406030204" pitchFamily="18" charset="0"/>
+                          <a:ea typeface="Cambria Math" panose="02040503050406030204" pitchFamily="18" charset="0"/>
+                        </a:rPr>
+                        <m:t>𝑡</m:t>
+                      </m:r>
+                      <m:acc>
+                        <m:accPr>
+                          <m:chr m:val="⃗"/>
+                          <m:ctrlPr>
+                            <a:rPr lang="en-US" b="0" i="1" smtClean="0">
+                              <a:latin typeface="Cambria Math" panose="02040503050406030204" pitchFamily="18" charset="0"/>
+                              <a:ea typeface="Cambria Math" panose="02040503050406030204" pitchFamily="18" charset="0"/>
+                            </a:rPr>
+                          </m:ctrlPr>
+                        </m:accPr>
+                        <m:e>
+                          <m:r>
+                            <a:rPr lang="en-US" b="0" i="1" smtClean="0">
+                              <a:latin typeface="Cambria Math" panose="02040503050406030204" pitchFamily="18" charset="0"/>
+                              <a:ea typeface="Cambria Math" panose="02040503050406030204" pitchFamily="18" charset="0"/>
+                            </a:rPr>
+                            <m:t>𝑑</m:t>
+                          </m:r>
+                        </m:e>
+                      </m:acc>
+                      <m:r>
+                        <a:rPr lang="en-US" i="1">
+                          <a:latin typeface="Cambria Math" panose="02040503050406030204" pitchFamily="18" charset="0"/>
+                          <a:ea typeface="Cambria Math" panose="02040503050406030204" pitchFamily="18" charset="0"/>
+                        </a:rPr>
+                        <m:t>∙</m:t>
+                      </m:r>
+                      <m:d>
+                        <m:dPr>
+                          <m:ctrlPr>
+                            <a:rPr lang="en-US" b="0" i="1" smtClean="0">
+                              <a:latin typeface="Cambria Math" panose="02040503050406030204" pitchFamily="18" charset="0"/>
+                              <a:ea typeface="Cambria Math" panose="02040503050406030204" pitchFamily="18" charset="0"/>
+                            </a:rPr>
+                          </m:ctrlPr>
+                        </m:dPr>
+                        <m:e>
+                          <m:r>
+                            <a:rPr lang="en-US" b="0" i="1" smtClean="0">
+                              <a:latin typeface="Cambria Math" panose="02040503050406030204" pitchFamily="18" charset="0"/>
+                              <a:ea typeface="Cambria Math" panose="02040503050406030204" pitchFamily="18" charset="0"/>
+                            </a:rPr>
+                            <m:t>𝑂</m:t>
+                          </m:r>
+                          <m:r>
+                            <a:rPr lang="en-US" b="0" i="1" smtClean="0">
+                              <a:latin typeface="Cambria Math" panose="02040503050406030204" pitchFamily="18" charset="0"/>
+                              <a:ea typeface="Cambria Math" panose="02040503050406030204" pitchFamily="18" charset="0"/>
+                            </a:rPr>
+                            <m:t>−</m:t>
+                          </m:r>
+                          <m:r>
+                            <a:rPr lang="en-US" b="0" i="1" smtClean="0">
+                              <a:latin typeface="Cambria Math" panose="02040503050406030204" pitchFamily="18" charset="0"/>
+                              <a:ea typeface="Cambria Math" panose="02040503050406030204" pitchFamily="18" charset="0"/>
+                            </a:rPr>
+                            <m:t>𝐶</m:t>
+                          </m:r>
+                        </m:e>
+                      </m:d>
+                      <m:r>
+                        <a:rPr lang="en-US" b="0" i="1" smtClean="0">
+                          <a:latin typeface="Cambria Math" panose="02040503050406030204" pitchFamily="18" charset="0"/>
+                          <a:ea typeface="Cambria Math" panose="02040503050406030204" pitchFamily="18" charset="0"/>
+                        </a:rPr>
+                        <m:t>+</m:t>
+                      </m:r>
+                      <m:d>
+                        <m:dPr>
+                          <m:ctrlPr>
+                            <a:rPr lang="en-US" b="0" i="1" smtClean="0">
+                              <a:latin typeface="Cambria Math" panose="02040503050406030204" pitchFamily="18" charset="0"/>
+                              <a:ea typeface="Cambria Math" panose="02040503050406030204" pitchFamily="18" charset="0"/>
+                            </a:rPr>
+                          </m:ctrlPr>
+                        </m:dPr>
+                        <m:e>
+                          <m:r>
+                            <a:rPr lang="en-US" b="0" i="1" smtClean="0">
+                              <a:latin typeface="Cambria Math" panose="02040503050406030204" pitchFamily="18" charset="0"/>
+                              <a:ea typeface="Cambria Math" panose="02040503050406030204" pitchFamily="18" charset="0"/>
+                            </a:rPr>
+                            <m:t>𝑂</m:t>
+                          </m:r>
+                          <m:r>
+                            <a:rPr lang="en-US" b="0" i="1" smtClean="0">
+                              <a:latin typeface="Cambria Math" panose="02040503050406030204" pitchFamily="18" charset="0"/>
+                              <a:ea typeface="Cambria Math" panose="02040503050406030204" pitchFamily="18" charset="0"/>
+                            </a:rPr>
+                            <m:t>−</m:t>
+                          </m:r>
+                          <m:r>
+                            <a:rPr lang="en-US" b="0" i="1" smtClean="0">
+                              <a:latin typeface="Cambria Math" panose="02040503050406030204" pitchFamily="18" charset="0"/>
+                              <a:ea typeface="Cambria Math" panose="02040503050406030204" pitchFamily="18" charset="0"/>
+                            </a:rPr>
+                            <m:t>𝐶</m:t>
+                          </m:r>
+                        </m:e>
+                      </m:d>
+                      <m:r>
+                        <a:rPr lang="en-US" b="0" i="1" smtClean="0">
+                          <a:latin typeface="Cambria Math" panose="02040503050406030204" pitchFamily="18" charset="0"/>
+                          <a:ea typeface="Cambria Math" panose="02040503050406030204" pitchFamily="18" charset="0"/>
+                        </a:rPr>
+                        <m:t>∙</m:t>
+                      </m:r>
+                      <m:d>
+                        <m:dPr>
+                          <m:ctrlPr>
+                            <a:rPr lang="en-US" b="0" i="1" smtClean="0">
+                              <a:latin typeface="Cambria Math" panose="02040503050406030204" pitchFamily="18" charset="0"/>
+                              <a:ea typeface="Cambria Math" panose="02040503050406030204" pitchFamily="18" charset="0"/>
+                            </a:rPr>
+                          </m:ctrlPr>
+                        </m:dPr>
+                        <m:e>
+                          <m:r>
+                            <a:rPr lang="en-US" b="0" i="1" smtClean="0">
+                              <a:latin typeface="Cambria Math" panose="02040503050406030204" pitchFamily="18" charset="0"/>
+                              <a:ea typeface="Cambria Math" panose="02040503050406030204" pitchFamily="18" charset="0"/>
+                            </a:rPr>
+                            <m:t>𝑂</m:t>
+                          </m:r>
+                          <m:r>
+                            <a:rPr lang="en-US" b="0" i="1" smtClean="0">
+                              <a:latin typeface="Cambria Math" panose="02040503050406030204" pitchFamily="18" charset="0"/>
+                              <a:ea typeface="Cambria Math" panose="02040503050406030204" pitchFamily="18" charset="0"/>
+                            </a:rPr>
+                            <m:t>−</m:t>
+                          </m:r>
+                          <m:r>
+                            <a:rPr lang="en-US" b="0" i="1" smtClean="0">
+                              <a:latin typeface="Cambria Math" panose="02040503050406030204" pitchFamily="18" charset="0"/>
+                              <a:ea typeface="Cambria Math" panose="02040503050406030204" pitchFamily="18" charset="0"/>
+                            </a:rPr>
+                            <m:t>𝐶</m:t>
+                          </m:r>
+                        </m:e>
+                      </m:d>
+                      <m:r>
+                        <a:rPr lang="en-US" b="0" i="1" smtClean="0">
+                          <a:latin typeface="Cambria Math" panose="02040503050406030204" pitchFamily="18" charset="0"/>
+                          <a:ea typeface="Cambria Math" panose="02040503050406030204" pitchFamily="18" charset="0"/>
+                        </a:rPr>
+                        <m:t>=</m:t>
+                      </m:r>
+                      <m:sSup>
+                        <m:sSupPr>
+                          <m:ctrlPr>
+                            <a:rPr lang="en-US" b="0" i="1" smtClean="0">
+                              <a:latin typeface="Cambria Math" panose="02040503050406030204" pitchFamily="18" charset="0"/>
+                              <a:ea typeface="Cambria Math" panose="02040503050406030204" pitchFamily="18" charset="0"/>
+                            </a:rPr>
+                          </m:ctrlPr>
+                        </m:sSupPr>
+                        <m:e>
+                          <m:r>
+                            <a:rPr lang="en-US" b="0" i="1" smtClean="0">
+                              <a:latin typeface="Cambria Math" panose="02040503050406030204" pitchFamily="18" charset="0"/>
+                              <a:ea typeface="Cambria Math" panose="02040503050406030204" pitchFamily="18" charset="0"/>
+                            </a:rPr>
+                            <m:t>𝑟</m:t>
+                          </m:r>
+                        </m:e>
+                        <m:sup>
+                          <m:r>
+                            <a:rPr lang="en-US" b="0" i="1" smtClean="0">
+                              <a:latin typeface="Cambria Math" panose="02040503050406030204" pitchFamily="18" charset="0"/>
+                              <a:ea typeface="Cambria Math" panose="02040503050406030204" pitchFamily="18" charset="0"/>
+                            </a:rPr>
+                            <m:t>2</m:t>
+                          </m:r>
+                        </m:sup>
+                      </m:sSup>
+                    </m:oMath>
+                  </m:oMathPara>
+                </a14:m>
+                <a:endParaRPr lang="en-US" b="0" dirty="0">
+                  <a:ea typeface="Cambria Math" panose="02040503050406030204" pitchFamily="18" charset="0"/>
+                </a:endParaRPr>
+              </a:p>
+              <a:p>
+                <a:pPr marL="0" indent="0">
+                  <a:lnSpc>
+                    <a:spcPct val="140000"/>
+                  </a:lnSpc>
+                  <a:buNone/>
+                </a:pPr>
+                <a14:m>
+                  <m:oMathPara xmlns:m="http://schemas.openxmlformats.org/officeDocument/2006/math">
+                    <m:oMath>
+                      <m:sSup>
+                        <m:sSupPr>
+                          <m:ctrlPr>
+                            <a:rPr lang="en-US" b="0" i="1" smtClean="0">
+                              <a:latin typeface="Cambria Math" panose="02040503050406030204" pitchFamily="18" charset="0"/>
+                            </a:rPr>
+                          </m:ctrlPr>
+                        </m:sSupPr>
+                        <m:e>
+                          <m:r>
+                            <a:rPr lang="en-US" b="0" i="1" smtClean="0">
+                              <a:latin typeface="Cambria Math" panose="02040503050406030204" pitchFamily="18" charset="0"/>
+                            </a:rPr>
+                            <m:t>𝑡</m:t>
+                          </m:r>
+                        </m:e>
+                        <m:sup>
+                          <m:r>
+                            <a:rPr lang="en-US" b="0" i="1" smtClean="0">
+                              <a:latin typeface="Cambria Math" panose="02040503050406030204" pitchFamily="18" charset="0"/>
+                            </a:rPr>
+                            <m:t>2</m:t>
+                          </m:r>
+                        </m:sup>
+                      </m:sSup>
+                      <m:d>
+                        <m:dPr>
+                          <m:ctrlPr>
+                            <a:rPr lang="en-US" b="0" i="1" smtClean="0">
+                              <a:latin typeface="Cambria Math" panose="02040503050406030204" pitchFamily="18" charset="0"/>
+                            </a:rPr>
+                          </m:ctrlPr>
+                        </m:dPr>
+                        <m:e>
+                          <m:acc>
+                            <m:accPr>
+                              <m:chr m:val="⃗"/>
+                              <m:ctrlPr>
+                                <a:rPr lang="en-US" b="0" i="1" smtClean="0">
+                                  <a:latin typeface="Cambria Math" panose="02040503050406030204" pitchFamily="18" charset="0"/>
+                                </a:rPr>
+                              </m:ctrlPr>
+                            </m:accPr>
+                            <m:e>
+                              <m:r>
+                                <a:rPr lang="en-US" b="0" i="1" smtClean="0">
+                                  <a:latin typeface="Cambria Math" panose="02040503050406030204" pitchFamily="18" charset="0"/>
+                                </a:rPr>
+                                <m:t>𝑑</m:t>
+                              </m:r>
+                            </m:e>
+                          </m:acc>
+                          <m:r>
+                            <a:rPr lang="en-US" i="1">
+                              <a:latin typeface="Cambria Math" panose="02040503050406030204" pitchFamily="18" charset="0"/>
+                              <a:ea typeface="Cambria Math" panose="02040503050406030204" pitchFamily="18" charset="0"/>
+                            </a:rPr>
+                            <m:t>∙</m:t>
+                          </m:r>
+                          <m:acc>
+                            <m:accPr>
+                              <m:chr m:val="⃗"/>
+                              <m:ctrlPr>
+                                <a:rPr lang="en-US" b="0" i="1" smtClean="0">
+                                  <a:latin typeface="Cambria Math" panose="02040503050406030204" pitchFamily="18" charset="0"/>
+                                  <a:ea typeface="Cambria Math" panose="02040503050406030204" pitchFamily="18" charset="0"/>
+                                </a:rPr>
+                              </m:ctrlPr>
+                            </m:accPr>
+                            <m:e>
+                              <m:r>
+                                <a:rPr lang="en-US" b="0" i="1" smtClean="0">
+                                  <a:latin typeface="Cambria Math" panose="02040503050406030204" pitchFamily="18" charset="0"/>
+                                  <a:ea typeface="Cambria Math" panose="02040503050406030204" pitchFamily="18" charset="0"/>
+                                </a:rPr>
+                                <m:t>𝑑</m:t>
+                              </m:r>
+                            </m:e>
+                          </m:acc>
+                        </m:e>
+                      </m:d>
+                      <m:r>
+                        <a:rPr lang="en-US" b="0" i="1" smtClean="0">
+                          <a:latin typeface="Cambria Math" panose="02040503050406030204" pitchFamily="18" charset="0"/>
+                          <a:ea typeface="Cambria Math" panose="02040503050406030204" pitchFamily="18" charset="0"/>
+                        </a:rPr>
+                        <m:t>+</m:t>
+                      </m:r>
+                      <m:r>
+                        <a:rPr lang="en-US" b="0" i="1" smtClean="0">
+                          <a:latin typeface="Cambria Math" panose="02040503050406030204" pitchFamily="18" charset="0"/>
+                          <a:ea typeface="Cambria Math" panose="02040503050406030204" pitchFamily="18" charset="0"/>
+                        </a:rPr>
+                        <m:t>𝑡</m:t>
+                      </m:r>
+                      <m:d>
+                        <m:dPr>
+                          <m:ctrlPr>
+                            <a:rPr lang="en-US" b="0" i="1" smtClean="0">
+                              <a:latin typeface="Cambria Math" panose="02040503050406030204" pitchFamily="18" charset="0"/>
+                              <a:ea typeface="Cambria Math" panose="02040503050406030204" pitchFamily="18" charset="0"/>
+                            </a:rPr>
+                          </m:ctrlPr>
+                        </m:dPr>
+                        <m:e>
+                          <m:r>
+                            <a:rPr lang="en-US" b="0" i="1" smtClean="0">
+                              <a:latin typeface="Cambria Math" panose="02040503050406030204" pitchFamily="18" charset="0"/>
+                              <a:ea typeface="Cambria Math" panose="02040503050406030204" pitchFamily="18" charset="0"/>
+                            </a:rPr>
+                            <m:t>2</m:t>
+                          </m:r>
+                          <m:acc>
+                            <m:accPr>
+                              <m:chr m:val="⃗"/>
+                              <m:ctrlPr>
+                                <a:rPr lang="en-US" b="0" i="1" smtClean="0">
+                                  <a:latin typeface="Cambria Math" panose="02040503050406030204" pitchFamily="18" charset="0"/>
+                                  <a:ea typeface="Cambria Math" panose="02040503050406030204" pitchFamily="18" charset="0"/>
+                                </a:rPr>
+                              </m:ctrlPr>
+                            </m:accPr>
+                            <m:e>
+                              <m:r>
+                                <a:rPr lang="en-US" b="0" i="1" smtClean="0">
+                                  <a:latin typeface="Cambria Math" panose="02040503050406030204" pitchFamily="18" charset="0"/>
+                                  <a:ea typeface="Cambria Math" panose="02040503050406030204" pitchFamily="18" charset="0"/>
+                                </a:rPr>
+                                <m:t>𝑑</m:t>
+                              </m:r>
+                            </m:e>
+                          </m:acc>
+                          <m:r>
+                            <a:rPr lang="en-US" i="1">
+                              <a:latin typeface="Cambria Math" panose="02040503050406030204" pitchFamily="18" charset="0"/>
+                              <a:ea typeface="Cambria Math" panose="02040503050406030204" pitchFamily="18" charset="0"/>
+                            </a:rPr>
+                            <m:t>∙</m:t>
+                          </m:r>
+                          <m:d>
+                            <m:dPr>
+                              <m:ctrlPr>
+                                <a:rPr lang="en-US" b="0" i="1" smtClean="0">
+                                  <a:latin typeface="Cambria Math" panose="02040503050406030204" pitchFamily="18" charset="0"/>
+                                  <a:ea typeface="Cambria Math" panose="02040503050406030204" pitchFamily="18" charset="0"/>
+                                </a:rPr>
+                              </m:ctrlPr>
+                            </m:dPr>
+                            <m:e>
+                              <m:r>
+                                <a:rPr lang="en-US" b="0" i="1" smtClean="0">
+                                  <a:latin typeface="Cambria Math" panose="02040503050406030204" pitchFamily="18" charset="0"/>
+                                  <a:ea typeface="Cambria Math" panose="02040503050406030204" pitchFamily="18" charset="0"/>
+                                </a:rPr>
+                                <m:t>𝑂</m:t>
+                              </m:r>
+                              <m:r>
+                                <a:rPr lang="en-US" b="0" i="1" smtClean="0">
+                                  <a:latin typeface="Cambria Math" panose="02040503050406030204" pitchFamily="18" charset="0"/>
+                                  <a:ea typeface="Cambria Math" panose="02040503050406030204" pitchFamily="18" charset="0"/>
+                                </a:rPr>
+                                <m:t>−</m:t>
+                              </m:r>
+                              <m:r>
+                                <a:rPr lang="en-US" b="0" i="1" smtClean="0">
+                                  <a:latin typeface="Cambria Math" panose="02040503050406030204" pitchFamily="18" charset="0"/>
+                                  <a:ea typeface="Cambria Math" panose="02040503050406030204" pitchFamily="18" charset="0"/>
+                                </a:rPr>
+                                <m:t>𝐶</m:t>
+                              </m:r>
+                            </m:e>
+                          </m:d>
+                        </m:e>
+                      </m:d>
+                      <m:r>
+                        <a:rPr lang="en-US" b="0" i="1" smtClean="0">
+                          <a:latin typeface="Cambria Math" panose="02040503050406030204" pitchFamily="18" charset="0"/>
+                          <a:ea typeface="Cambria Math" panose="02040503050406030204" pitchFamily="18" charset="0"/>
+                        </a:rPr>
+                        <m:t>+</m:t>
+                      </m:r>
+                      <m:d>
+                        <m:dPr>
+                          <m:ctrlPr>
+                            <a:rPr lang="en-US" b="0" i="1" smtClean="0">
+                              <a:latin typeface="Cambria Math" panose="02040503050406030204" pitchFamily="18" charset="0"/>
+                              <a:ea typeface="Cambria Math" panose="02040503050406030204" pitchFamily="18" charset="0"/>
+                            </a:rPr>
+                          </m:ctrlPr>
+                        </m:dPr>
+                        <m:e>
+                          <m:d>
+                            <m:dPr>
+                              <m:ctrlPr>
+                                <a:rPr lang="en-US" b="0" i="1" smtClean="0">
+                                  <a:latin typeface="Cambria Math" panose="02040503050406030204" pitchFamily="18" charset="0"/>
+                                  <a:ea typeface="Cambria Math" panose="02040503050406030204" pitchFamily="18" charset="0"/>
+                                </a:rPr>
+                              </m:ctrlPr>
+                            </m:dPr>
+                            <m:e>
+                              <m:r>
+                                <a:rPr lang="en-US" b="0" i="1" smtClean="0">
+                                  <a:latin typeface="Cambria Math" panose="02040503050406030204" pitchFamily="18" charset="0"/>
+                                  <a:ea typeface="Cambria Math" panose="02040503050406030204" pitchFamily="18" charset="0"/>
+                                </a:rPr>
+                                <m:t>𝑂</m:t>
+                              </m:r>
+                              <m:r>
+                                <a:rPr lang="en-US" b="0" i="1" smtClean="0">
+                                  <a:latin typeface="Cambria Math" panose="02040503050406030204" pitchFamily="18" charset="0"/>
+                                  <a:ea typeface="Cambria Math" panose="02040503050406030204" pitchFamily="18" charset="0"/>
+                                </a:rPr>
+                                <m:t>−</m:t>
+                              </m:r>
+                              <m:r>
+                                <a:rPr lang="en-US" b="0" i="1" smtClean="0">
+                                  <a:latin typeface="Cambria Math" panose="02040503050406030204" pitchFamily="18" charset="0"/>
+                                  <a:ea typeface="Cambria Math" panose="02040503050406030204" pitchFamily="18" charset="0"/>
+                                </a:rPr>
+                                <m:t>𝐶</m:t>
+                              </m:r>
+                            </m:e>
+                          </m:d>
+                          <m:r>
+                            <a:rPr lang="en-US" b="0" i="1" smtClean="0">
+                              <a:latin typeface="Cambria Math" panose="02040503050406030204" pitchFamily="18" charset="0"/>
+                              <a:ea typeface="Cambria Math" panose="02040503050406030204" pitchFamily="18" charset="0"/>
+                            </a:rPr>
+                            <m:t>∙</m:t>
+                          </m:r>
+                          <m:d>
+                            <m:dPr>
+                              <m:ctrlPr>
+                                <a:rPr lang="en-US" b="0" i="1" smtClean="0">
+                                  <a:latin typeface="Cambria Math" panose="02040503050406030204" pitchFamily="18" charset="0"/>
+                                  <a:ea typeface="Cambria Math" panose="02040503050406030204" pitchFamily="18" charset="0"/>
+                                </a:rPr>
+                              </m:ctrlPr>
+                            </m:dPr>
+                            <m:e>
+                              <m:r>
+                                <a:rPr lang="en-US" b="0" i="1" smtClean="0">
+                                  <a:latin typeface="Cambria Math" panose="02040503050406030204" pitchFamily="18" charset="0"/>
+                                  <a:ea typeface="Cambria Math" panose="02040503050406030204" pitchFamily="18" charset="0"/>
+                                </a:rPr>
+                                <m:t>𝑂</m:t>
+                              </m:r>
+                              <m:r>
+                                <a:rPr lang="en-US" b="0" i="1" smtClean="0">
+                                  <a:latin typeface="Cambria Math" panose="02040503050406030204" pitchFamily="18" charset="0"/>
+                                  <a:ea typeface="Cambria Math" panose="02040503050406030204" pitchFamily="18" charset="0"/>
+                                </a:rPr>
+                                <m:t>−</m:t>
+                              </m:r>
+                              <m:r>
+                                <a:rPr lang="en-US" b="0" i="1" smtClean="0">
+                                  <a:latin typeface="Cambria Math" panose="02040503050406030204" pitchFamily="18" charset="0"/>
+                                  <a:ea typeface="Cambria Math" panose="02040503050406030204" pitchFamily="18" charset="0"/>
+                                </a:rPr>
+                                <m:t>𝐶</m:t>
+                              </m:r>
+                            </m:e>
+                          </m:d>
+                          <m:r>
+                            <a:rPr lang="en-US" b="0" i="1" smtClean="0">
+                              <a:latin typeface="Cambria Math" panose="02040503050406030204" pitchFamily="18" charset="0"/>
+                              <a:ea typeface="Cambria Math" panose="02040503050406030204" pitchFamily="18" charset="0"/>
+                            </a:rPr>
+                            <m:t>−</m:t>
+                          </m:r>
+                          <m:sSup>
+                            <m:sSupPr>
+                              <m:ctrlPr>
+                                <a:rPr lang="en-US" b="0" i="1" smtClean="0">
+                                  <a:latin typeface="Cambria Math" panose="02040503050406030204" pitchFamily="18" charset="0"/>
+                                  <a:ea typeface="Cambria Math" panose="02040503050406030204" pitchFamily="18" charset="0"/>
+                                </a:rPr>
+                              </m:ctrlPr>
+                            </m:sSupPr>
+                            <m:e>
+                              <m:r>
+                                <a:rPr lang="en-US" b="0" i="1" smtClean="0">
+                                  <a:latin typeface="Cambria Math" panose="02040503050406030204" pitchFamily="18" charset="0"/>
+                                  <a:ea typeface="Cambria Math" panose="02040503050406030204" pitchFamily="18" charset="0"/>
+                                </a:rPr>
+                                <m:t>𝑟</m:t>
+                              </m:r>
+                            </m:e>
+                            <m:sup>
+                              <m:r>
+                                <a:rPr lang="en-US" b="0" i="1" smtClean="0">
+                                  <a:latin typeface="Cambria Math" panose="02040503050406030204" pitchFamily="18" charset="0"/>
+                                  <a:ea typeface="Cambria Math" panose="02040503050406030204" pitchFamily="18" charset="0"/>
+                                </a:rPr>
+                                <m:t>2</m:t>
+                              </m:r>
+                            </m:sup>
+                          </m:sSup>
+                        </m:e>
+                      </m:d>
+                      <m:r>
+                        <a:rPr lang="en-US" b="0" i="1" smtClean="0">
+                          <a:latin typeface="Cambria Math" panose="02040503050406030204" pitchFamily="18" charset="0"/>
+                          <a:ea typeface="Cambria Math" panose="02040503050406030204" pitchFamily="18" charset="0"/>
+                        </a:rPr>
+                        <m:t>=0</m:t>
+                      </m:r>
+                    </m:oMath>
+                  </m:oMathPara>
+                </a14:m>
+                <a:endParaRPr lang="en-US" b="0" dirty="0">
+                  <a:ea typeface="Cambria Math" panose="02040503050406030204" pitchFamily="18" charset="0"/>
+                </a:endParaRPr>
+              </a:p>
+              <a:p>
+                <a:pPr marL="0" indent="0">
+                  <a:lnSpc>
+                    <a:spcPct val="140000"/>
+                  </a:lnSpc>
+                  <a:buNone/>
+                </a:pPr>
+                <a14:m>
+                  <m:oMathPara xmlns:m="http://schemas.openxmlformats.org/officeDocument/2006/math">
+                    <m:oMath>
+                      <m:r>
+                        <a:rPr lang="en-US" b="0" i="1" smtClean="0">
+                          <a:latin typeface="Cambria Math" panose="02040503050406030204" pitchFamily="18" charset="0"/>
+                        </a:rPr>
+                        <m:t>𝑎</m:t>
+                      </m:r>
+                      <m:r>
+                        <a:rPr lang="en-US" b="0" i="1" smtClean="0">
+                          <a:latin typeface="Cambria Math" panose="02040503050406030204" pitchFamily="18" charset="0"/>
+                        </a:rPr>
+                        <m:t>=</m:t>
+                      </m:r>
+                      <m:d>
+                        <m:dPr>
+                          <m:ctrlPr>
+                            <a:rPr lang="en-US" i="1">
+                              <a:latin typeface="Cambria Math" panose="02040503050406030204" pitchFamily="18" charset="0"/>
+                            </a:rPr>
+                          </m:ctrlPr>
+                        </m:dPr>
+                        <m:e>
+                          <m:acc>
+                            <m:accPr>
+                              <m:chr m:val="⃗"/>
+                              <m:ctrlPr>
+                                <a:rPr lang="en-US" i="1">
+                                  <a:latin typeface="Cambria Math" panose="02040503050406030204" pitchFamily="18" charset="0"/>
+                                </a:rPr>
+                              </m:ctrlPr>
+                            </m:accPr>
+                            <m:e>
+                              <m:r>
+                                <a:rPr lang="en-US" i="1">
+                                  <a:latin typeface="Cambria Math" panose="02040503050406030204" pitchFamily="18" charset="0"/>
+                                </a:rPr>
+                                <m:t>𝑑</m:t>
+                              </m:r>
+                            </m:e>
+                          </m:acc>
+                          <m:r>
+                            <a:rPr lang="en-US" i="1">
+                              <a:latin typeface="Cambria Math" panose="02040503050406030204" pitchFamily="18" charset="0"/>
+                              <a:ea typeface="Cambria Math" panose="02040503050406030204" pitchFamily="18" charset="0"/>
+                            </a:rPr>
+                            <m:t>∙</m:t>
+                          </m:r>
+                          <m:acc>
+                            <m:accPr>
+                              <m:chr m:val="⃗"/>
+                              <m:ctrlPr>
+                                <a:rPr lang="en-US" i="1">
+                                  <a:latin typeface="Cambria Math" panose="02040503050406030204" pitchFamily="18" charset="0"/>
+                                  <a:ea typeface="Cambria Math" panose="02040503050406030204" pitchFamily="18" charset="0"/>
+                                </a:rPr>
+                              </m:ctrlPr>
+                            </m:accPr>
+                            <m:e>
+                              <m:r>
+                                <a:rPr lang="en-US" i="1">
+                                  <a:latin typeface="Cambria Math" panose="02040503050406030204" pitchFamily="18" charset="0"/>
+                                  <a:ea typeface="Cambria Math" panose="02040503050406030204" pitchFamily="18" charset="0"/>
+                                </a:rPr>
+                                <m:t>𝑑</m:t>
+                              </m:r>
+                            </m:e>
+                          </m:acc>
+                        </m:e>
+                      </m:d>
+                      <m:r>
+                        <a:rPr lang="en-US" b="0" i="1" smtClean="0">
+                          <a:latin typeface="Cambria Math" panose="02040503050406030204" pitchFamily="18" charset="0"/>
+                          <a:ea typeface="Cambria Math" panose="02040503050406030204" pitchFamily="18" charset="0"/>
+                        </a:rPr>
+                        <m:t>, </m:t>
+                      </m:r>
+                      <m:r>
+                        <a:rPr lang="en-US" b="0" i="1" smtClean="0">
+                          <a:latin typeface="Cambria Math" panose="02040503050406030204" pitchFamily="18" charset="0"/>
+                          <a:ea typeface="Cambria Math" panose="02040503050406030204" pitchFamily="18" charset="0"/>
+                        </a:rPr>
+                        <m:t>𝑏</m:t>
+                      </m:r>
+                      <m:r>
+                        <a:rPr lang="en-US" b="0" i="1" smtClean="0">
+                          <a:latin typeface="Cambria Math" panose="02040503050406030204" pitchFamily="18" charset="0"/>
+                          <a:ea typeface="Cambria Math" panose="02040503050406030204" pitchFamily="18" charset="0"/>
+                        </a:rPr>
+                        <m:t>=2</m:t>
+                      </m:r>
+                      <m:acc>
+                        <m:accPr>
+                          <m:chr m:val="⃗"/>
+                          <m:ctrlPr>
+                            <a:rPr lang="en-US" b="0" i="1" smtClean="0">
+                              <a:latin typeface="Cambria Math" panose="02040503050406030204" pitchFamily="18" charset="0"/>
+                              <a:ea typeface="Cambria Math" panose="02040503050406030204" pitchFamily="18" charset="0"/>
+                            </a:rPr>
+                          </m:ctrlPr>
+                        </m:accPr>
+                        <m:e>
+                          <m:r>
+                            <a:rPr lang="en-US" b="0" i="1" smtClean="0">
+                              <a:latin typeface="Cambria Math" panose="02040503050406030204" pitchFamily="18" charset="0"/>
+                              <a:ea typeface="Cambria Math" panose="02040503050406030204" pitchFamily="18" charset="0"/>
+                            </a:rPr>
+                            <m:t>𝑑</m:t>
+                          </m:r>
+                        </m:e>
+                      </m:acc>
+                      <m:r>
+                        <a:rPr lang="en-US" i="1">
+                          <a:latin typeface="Cambria Math" panose="02040503050406030204" pitchFamily="18" charset="0"/>
+                          <a:ea typeface="Cambria Math" panose="02040503050406030204" pitchFamily="18" charset="0"/>
+                        </a:rPr>
+                        <m:t>∙</m:t>
+                      </m:r>
+                      <m:d>
+                        <m:dPr>
+                          <m:ctrlPr>
+                            <a:rPr lang="en-US" b="0" i="1" smtClean="0">
+                              <a:latin typeface="Cambria Math" panose="02040503050406030204" pitchFamily="18" charset="0"/>
+                              <a:ea typeface="Cambria Math" panose="02040503050406030204" pitchFamily="18" charset="0"/>
+                            </a:rPr>
+                          </m:ctrlPr>
+                        </m:dPr>
+                        <m:e>
+                          <m:r>
+                            <a:rPr lang="en-US" b="0" i="1" smtClean="0">
+                              <a:latin typeface="Cambria Math" panose="02040503050406030204" pitchFamily="18" charset="0"/>
+                              <a:ea typeface="Cambria Math" panose="02040503050406030204" pitchFamily="18" charset="0"/>
+                            </a:rPr>
+                            <m:t>𝑂</m:t>
+                          </m:r>
+                          <m:r>
+                            <a:rPr lang="en-US" b="0" i="1" smtClean="0">
+                              <a:latin typeface="Cambria Math" panose="02040503050406030204" pitchFamily="18" charset="0"/>
+                              <a:ea typeface="Cambria Math" panose="02040503050406030204" pitchFamily="18" charset="0"/>
+                            </a:rPr>
+                            <m:t>−</m:t>
+                          </m:r>
+                          <m:r>
+                            <a:rPr lang="en-US" b="0" i="1" smtClean="0">
+                              <a:latin typeface="Cambria Math" panose="02040503050406030204" pitchFamily="18" charset="0"/>
+                              <a:ea typeface="Cambria Math" panose="02040503050406030204" pitchFamily="18" charset="0"/>
+                            </a:rPr>
+                            <m:t>𝐶</m:t>
+                          </m:r>
+                        </m:e>
+                      </m:d>
+                      <m:r>
+                        <a:rPr lang="en-US" b="0" i="1" smtClean="0">
+                          <a:latin typeface="Cambria Math" panose="02040503050406030204" pitchFamily="18" charset="0"/>
+                          <a:ea typeface="Cambria Math" panose="02040503050406030204" pitchFamily="18" charset="0"/>
+                        </a:rPr>
+                        <m:t>,</m:t>
+                      </m:r>
+                      <m:r>
+                        <a:rPr lang="en-US" b="0" i="1" smtClean="0">
+                          <a:latin typeface="Cambria Math" panose="02040503050406030204" pitchFamily="18" charset="0"/>
+                          <a:ea typeface="Cambria Math" panose="02040503050406030204" pitchFamily="18" charset="0"/>
+                        </a:rPr>
+                        <m:t>𝑐</m:t>
+                      </m:r>
+                      <m:r>
+                        <a:rPr lang="en-US" b="0" i="1" smtClean="0">
+                          <a:latin typeface="Cambria Math" panose="02040503050406030204" pitchFamily="18" charset="0"/>
+                          <a:ea typeface="Cambria Math" panose="02040503050406030204" pitchFamily="18" charset="0"/>
+                        </a:rPr>
+                        <m:t>=</m:t>
+                      </m:r>
+                      <m:d>
+                        <m:dPr>
+                          <m:ctrlPr>
+                            <a:rPr lang="en-US" b="0" i="1" smtClean="0">
+                              <a:latin typeface="Cambria Math" panose="02040503050406030204" pitchFamily="18" charset="0"/>
+                              <a:ea typeface="Cambria Math" panose="02040503050406030204" pitchFamily="18" charset="0"/>
+                            </a:rPr>
+                          </m:ctrlPr>
+                        </m:dPr>
+                        <m:e>
+                          <m:r>
+                            <a:rPr lang="en-US" b="0" i="1" smtClean="0">
+                              <a:latin typeface="Cambria Math" panose="02040503050406030204" pitchFamily="18" charset="0"/>
+                              <a:ea typeface="Cambria Math" panose="02040503050406030204" pitchFamily="18" charset="0"/>
+                            </a:rPr>
+                            <m:t>𝑂</m:t>
+                          </m:r>
+                          <m:r>
+                            <a:rPr lang="en-US" b="0" i="1" smtClean="0">
+                              <a:latin typeface="Cambria Math" panose="02040503050406030204" pitchFamily="18" charset="0"/>
+                              <a:ea typeface="Cambria Math" panose="02040503050406030204" pitchFamily="18" charset="0"/>
+                            </a:rPr>
+                            <m:t>−</m:t>
+                          </m:r>
+                          <m:r>
+                            <a:rPr lang="en-US" b="0" i="1" smtClean="0">
+                              <a:latin typeface="Cambria Math" panose="02040503050406030204" pitchFamily="18" charset="0"/>
+                              <a:ea typeface="Cambria Math" panose="02040503050406030204" pitchFamily="18" charset="0"/>
+                            </a:rPr>
+                            <m:t>𝐶</m:t>
+                          </m:r>
+                        </m:e>
+                      </m:d>
+                      <m:r>
+                        <a:rPr lang="en-US" b="0" i="1" smtClean="0">
+                          <a:latin typeface="Cambria Math" panose="02040503050406030204" pitchFamily="18" charset="0"/>
+                          <a:ea typeface="Cambria Math" panose="02040503050406030204" pitchFamily="18" charset="0"/>
+                        </a:rPr>
+                        <m:t>∙</m:t>
+                      </m:r>
+                      <m:d>
+                        <m:dPr>
+                          <m:ctrlPr>
+                            <a:rPr lang="en-US" b="0" i="1" smtClean="0">
+                              <a:latin typeface="Cambria Math" panose="02040503050406030204" pitchFamily="18" charset="0"/>
+                              <a:ea typeface="Cambria Math" panose="02040503050406030204" pitchFamily="18" charset="0"/>
+                            </a:rPr>
+                          </m:ctrlPr>
+                        </m:dPr>
+                        <m:e>
+                          <m:r>
+                            <a:rPr lang="en-US" b="0" i="1" smtClean="0">
+                              <a:latin typeface="Cambria Math" panose="02040503050406030204" pitchFamily="18" charset="0"/>
+                              <a:ea typeface="Cambria Math" panose="02040503050406030204" pitchFamily="18" charset="0"/>
+                            </a:rPr>
+                            <m:t>𝑂</m:t>
+                          </m:r>
+                          <m:r>
+                            <a:rPr lang="en-US" b="0" i="1" smtClean="0">
+                              <a:latin typeface="Cambria Math" panose="02040503050406030204" pitchFamily="18" charset="0"/>
+                              <a:ea typeface="Cambria Math" panose="02040503050406030204" pitchFamily="18" charset="0"/>
+                            </a:rPr>
+                            <m:t>−</m:t>
+                          </m:r>
+                          <m:r>
+                            <a:rPr lang="en-US" b="0" i="1" smtClean="0">
+                              <a:latin typeface="Cambria Math" panose="02040503050406030204" pitchFamily="18" charset="0"/>
+                              <a:ea typeface="Cambria Math" panose="02040503050406030204" pitchFamily="18" charset="0"/>
+                            </a:rPr>
+                            <m:t>𝐶</m:t>
+                          </m:r>
+                        </m:e>
+                      </m:d>
+                      <m:r>
+                        <a:rPr lang="en-US" b="0" i="1" smtClean="0">
+                          <a:latin typeface="Cambria Math" panose="02040503050406030204" pitchFamily="18" charset="0"/>
+                          <a:ea typeface="Cambria Math" panose="02040503050406030204" pitchFamily="18" charset="0"/>
+                        </a:rPr>
+                        <m:t>−</m:t>
+                      </m:r>
+                      <m:sSup>
+                        <m:sSupPr>
+                          <m:ctrlPr>
+                            <a:rPr lang="en-US" b="0" i="1" smtClean="0">
+                              <a:latin typeface="Cambria Math" panose="02040503050406030204" pitchFamily="18" charset="0"/>
+                              <a:ea typeface="Cambria Math" panose="02040503050406030204" pitchFamily="18" charset="0"/>
+                            </a:rPr>
+                          </m:ctrlPr>
+                        </m:sSupPr>
+                        <m:e>
+                          <m:r>
+                            <a:rPr lang="en-US" b="0" i="1" smtClean="0">
+                              <a:latin typeface="Cambria Math" panose="02040503050406030204" pitchFamily="18" charset="0"/>
+                              <a:ea typeface="Cambria Math" panose="02040503050406030204" pitchFamily="18" charset="0"/>
+                            </a:rPr>
+                            <m:t>𝑟</m:t>
+                          </m:r>
+                        </m:e>
+                        <m:sup>
+                          <m:r>
+                            <a:rPr lang="en-US" b="0" i="1" smtClean="0">
+                              <a:latin typeface="Cambria Math" panose="02040503050406030204" pitchFamily="18" charset="0"/>
+                              <a:ea typeface="Cambria Math" panose="02040503050406030204" pitchFamily="18" charset="0"/>
+                            </a:rPr>
+                            <m:t>2</m:t>
+                          </m:r>
+                        </m:sup>
+                      </m:sSup>
+                    </m:oMath>
+                  </m:oMathPara>
+                </a14:m>
+                <a:endParaRPr lang="en-US" dirty="0"/>
+              </a:p>
+            </p:txBody>
+          </p:sp>
+        </mc:Choice>
+        <mc:Fallback xmlns="">
+          <p:sp>
+            <p:nvSpPr>
+              <p:cNvPr id="3" name="Content Placeholder 2">
+                <a:extLst>
+                  <a:ext uri="{FF2B5EF4-FFF2-40B4-BE49-F238E27FC236}">
+                    <a16:creationId xmlns:a16="http://schemas.microsoft.com/office/drawing/2014/main" id="{5EEC383C-0DF0-4681-7B7C-88F1A943357A}"/>
+                  </a:ext>
+                </a:extLst>
+              </p:cNvPr>
+              <p:cNvSpPr>
+                <a:spLocks noGrp="1" noRot="1" noChangeAspect="1" noMove="1" noResize="1" noEditPoints="1" noAdjustHandles="1" noChangeArrowheads="1" noChangeShapeType="1" noTextEdit="1"/>
+              </p:cNvSpPr>
+              <p:nvPr>
+                <p:ph idx="1"/>
+              </p:nvPr>
+            </p:nvSpPr>
+            <p:spPr>
+              <a:blipFill>
+                <a:blip r:embed="rId2"/>
+                <a:stretch>
+                  <a:fillRect/>
+                </a:stretch>
+              </a:blipFill>
+            </p:spPr>
+            <p:txBody>
+              <a:bodyPr/>
+              <a:lstStyle/>
+              <a:p>
+                <a:r>
+                  <a:rPr lang="en-US">
+                    <a:noFill/>
+                  </a:rPr>
+                  <a:t> </a:t>
+                </a:r>
+              </a:p>
+            </p:txBody>
+          </p:sp>
+        </mc:Fallback>
+      </mc:AlternateContent>
     </p:spTree>
     <p:extLst>
       <p:ext uri="{BB962C8B-B14F-4D97-AF65-F5344CB8AC3E}">
-        <p14:creationId xmlns:p14="http://schemas.microsoft.com/office/powerpoint/2010/main" val="2277960259"/>
+        <p14:creationId xmlns:p14="http://schemas.microsoft.com/office/powerpoint/2010/main" val="2413106270"/>
       </p:ext>
     </p:extLst>
   </p:cSld>
@@ -5537,7 +8763,7 @@
           <p:cNvPr id="2" name="Title 1">
             <a:extLst>
               <a:ext uri="{FF2B5EF4-FFF2-40B4-BE49-F238E27FC236}">
-                <a16:creationId xmlns:a16="http://schemas.microsoft.com/office/drawing/2014/main" id="{D3EE4EF4-7B78-6382-B587-6656D5DFDF12}"/>
+                <a16:creationId xmlns:a16="http://schemas.microsoft.com/office/drawing/2014/main" id="{61C8FF5C-3027-9A43-FC65-C00577719BEF}"/>
               </a:ext>
             </a:extLst>
           </p:cNvPr>
@@ -5555,109 +8781,73 @@
           <a:p>
             <a:r>
               <a:rPr lang="en-US" dirty="0"/>
+              <a:t>Ray scattering</a:t>
+            </a:r>
+          </a:p>
+        </p:txBody>
+      </p:sp>
+      <p:sp>
+        <p:nvSpPr>
+          <p:cNvPr id="3" name="Content Placeholder 2">
+            <a:extLst>
+              <a:ext uri="{FF2B5EF4-FFF2-40B4-BE49-F238E27FC236}">
+                <a16:creationId xmlns:a16="http://schemas.microsoft.com/office/drawing/2014/main" id="{5AE6B0D2-5C5E-6727-CBFD-96A3E7FB25E5}"/>
+              </a:ext>
+            </a:extLst>
+          </p:cNvPr>
+          <p:cNvSpPr>
+            <a:spLocks noGrp="1"/>
+          </p:cNvSpPr>
+          <p:nvPr>
+            <p:ph idx="1"/>
+          </p:nvPr>
+        </p:nvSpPr>
+        <p:spPr/>
+        <p:txBody>
+          <a:bodyPr/>
+          <a:lstStyle/>
+          <a:p>
+            <a:r>
+              <a:rPr lang="en-US" dirty="0"/>
+              <a:t>After a ray hits a surface, we need to scatter it</a:t>
+            </a:r>
+          </a:p>
+          <a:p>
+            <a:r>
+              <a:rPr lang="en-US" dirty="0"/>
+              <a:t>Influences the material properties of the surface</a:t>
+            </a:r>
+          </a:p>
+          <a:p>
+            <a:r>
+              <a:rPr lang="en-US" dirty="0"/>
               <a:t>Diffuse scattering</a:t>
             </a:r>
           </a:p>
-        </p:txBody>
-      </p:sp>
-      <p:sp>
-        <p:nvSpPr>
-          <p:cNvPr id="3" name="Content Placeholder 2">
-            <a:extLst>
-              <a:ext uri="{FF2B5EF4-FFF2-40B4-BE49-F238E27FC236}">
-                <a16:creationId xmlns:a16="http://schemas.microsoft.com/office/drawing/2014/main" id="{D20249F7-BAD9-E8A4-0AB3-C5F0DD9754DA}"/>
-              </a:ext>
-            </a:extLst>
-          </p:cNvPr>
-          <p:cNvSpPr>
-            <a:spLocks noGrp="1"/>
-          </p:cNvSpPr>
-          <p:nvPr>
-            <p:ph idx="1"/>
-          </p:nvPr>
-        </p:nvSpPr>
-        <p:spPr/>
-        <p:txBody>
-          <a:bodyPr/>
-          <a:lstStyle/>
-          <a:p>
-            <a:r>
-              <a:rPr lang="en-US" dirty="0"/>
-              <a:t>Mimics rough, non-reflective surfaces</a:t>
-            </a:r>
-          </a:p>
-          <a:p>
-            <a:r>
-              <a:rPr lang="en-US" dirty="0"/>
-              <a:t>A ray is bounced in a random direction in the same hemisphere as the normal</a:t>
-            </a:r>
-          </a:p>
-        </p:txBody>
-      </p:sp>
-      <p:pic>
-        <p:nvPicPr>
-          <p:cNvPr id="4" name="Picture 3">
-            <a:extLst>
-              <a:ext uri="{FF2B5EF4-FFF2-40B4-BE49-F238E27FC236}">
-                <a16:creationId xmlns:a16="http://schemas.microsoft.com/office/drawing/2014/main" id="{0C8D7C44-5AB3-6ECC-81D2-4407FB5363DE}"/>
-              </a:ext>
-            </a:extLst>
-          </p:cNvPr>
-          <p:cNvPicPr>
-            <a:picLocks noChangeAspect="1"/>
-          </p:cNvPicPr>
-          <p:nvPr/>
-        </p:nvPicPr>
-        <p:blipFill>
-          <a:blip r:embed="rId2"/>
-          <a:stretch>
-            <a:fillRect/>
-          </a:stretch>
-        </p:blipFill>
-        <p:spPr>
-          <a:xfrm>
-            <a:off x="1444752" y="3244789"/>
-            <a:ext cx="4352544" cy="3248086"/>
-          </a:xfrm>
-          <a:prstGeom prst="rect">
-            <a:avLst/>
-          </a:prstGeom>
-        </p:spPr>
-      </p:pic>
-      <p:pic>
-        <p:nvPicPr>
-          <p:cNvPr id="6" name="Picture 5">
-            <a:extLst>
-              <a:ext uri="{FF2B5EF4-FFF2-40B4-BE49-F238E27FC236}">
-                <a16:creationId xmlns:a16="http://schemas.microsoft.com/office/drawing/2014/main" id="{BD040E98-4AC4-6124-E6A2-F230E0ACC1BF}"/>
-              </a:ext>
-            </a:extLst>
-          </p:cNvPr>
-          <p:cNvPicPr>
-            <a:picLocks noChangeAspect="1"/>
-          </p:cNvPicPr>
-          <p:nvPr/>
-        </p:nvPicPr>
-        <p:blipFill>
-          <a:blip r:embed="rId3"/>
-          <a:stretch>
-            <a:fillRect/>
-          </a:stretch>
-        </p:blipFill>
-        <p:spPr>
-          <a:xfrm>
-            <a:off x="7435596" y="3447288"/>
-            <a:ext cx="3810000" cy="2143125"/>
-          </a:xfrm>
-          <a:prstGeom prst="rect">
-            <a:avLst/>
-          </a:prstGeom>
-        </p:spPr>
-      </p:pic>
+          <a:p>
+            <a:r>
+              <a:rPr lang="en-US" dirty="0"/>
+              <a:t>Lambertian scattering</a:t>
+            </a:r>
+          </a:p>
+          <a:p>
+            <a:r>
+              <a:rPr lang="en-US" dirty="0"/>
+              <a:t>Reflective scattering</a:t>
+            </a:r>
+          </a:p>
+          <a:p>
+            <a:r>
+              <a:rPr lang="en-US" dirty="0"/>
+              <a:t>Dielectric scattering (next week)</a:t>
+            </a:r>
+          </a:p>
+        </p:txBody>
+      </p:sp>
     </p:spTree>
     <p:extLst>
       <p:ext uri="{BB962C8B-B14F-4D97-AF65-F5344CB8AC3E}">
-        <p14:creationId xmlns:p14="http://schemas.microsoft.com/office/powerpoint/2010/main" val="2517021950"/>
+        <p14:creationId xmlns:p14="http://schemas.microsoft.com/office/powerpoint/2010/main" val="2277960259"/>
       </p:ext>
     </p:extLst>
   </p:cSld>
@@ -5980,4 +9170,319 @@
     </a:ext>
   </a:extLst>
 </a:theme>
+</file>
+
+<file path=ppt/theme/theme2.xml><?xml version="1.0" encoding="utf-8"?>
+<a:theme xmlns:a="http://schemas.openxmlformats.org/drawingml/2006/main" name="Office Theme">
+  <a:themeElements>
+    <a:clrScheme name="Office">
+      <a:dk1>
+        <a:sysClr val="windowText" lastClr="000000"/>
+      </a:dk1>
+      <a:lt1>
+        <a:sysClr val="window" lastClr="FFFFFF"/>
+      </a:lt1>
+      <a:dk2>
+        <a:srgbClr val="0E2841"/>
+      </a:dk2>
+      <a:lt2>
+        <a:srgbClr val="E8E8E8"/>
+      </a:lt2>
+      <a:accent1>
+        <a:srgbClr val="156082"/>
+      </a:accent1>
+      <a:accent2>
+        <a:srgbClr val="E97132"/>
+      </a:accent2>
+      <a:accent3>
+        <a:srgbClr val="196B24"/>
+      </a:accent3>
+      <a:accent4>
+        <a:srgbClr val="0F9ED5"/>
+      </a:accent4>
+      <a:accent5>
+        <a:srgbClr val="A02B93"/>
+      </a:accent5>
+      <a:accent6>
+        <a:srgbClr val="4EA72E"/>
+      </a:accent6>
+      <a:hlink>
+        <a:srgbClr val="467886"/>
+      </a:hlink>
+      <a:folHlink>
+        <a:srgbClr val="96607D"/>
+      </a:folHlink>
+    </a:clrScheme>
+    <a:fontScheme name="Office">
+      <a:majorFont>
+        <a:latin typeface="Aptos Display" panose="02110004020202020204"/>
+        <a:ea typeface=""/>
+        <a:cs typeface=""/>
+        <a:font script="Jpan" typeface="游ゴシック Light"/>
+        <a:font script="Hang" typeface="맑은 고딕"/>
+        <a:font script="Hans" typeface="等线 Light"/>
+        <a:font script="Hant" typeface="新細明體"/>
+        <a:font script="Arab" typeface="Times New Roman"/>
+        <a:font script="Hebr" typeface="Times New Roman"/>
+        <a:font script="Thai" typeface="Angsana New"/>
+        <a:font script="Ethi" typeface="Nyala"/>
+        <a:font script="Beng" typeface="Vrinda"/>
+        <a:font script="Gujr" typeface="Shruti"/>
+        <a:font script="Khmr" typeface="MoolBoran"/>
+        <a:font script="Knda" typeface="Tunga"/>
+        <a:font script="Guru" typeface="Raavi"/>
+        <a:font script="Cans" typeface="Euphemia"/>
+        <a:font script="Cher" typeface="Plantagenet Cherokee"/>
+        <a:font script="Yiii" typeface="Microsoft Yi Baiti"/>
+        <a:font script="Tibt" typeface="Microsoft Himalaya"/>
+        <a:font script="Thaa" typeface="MV Boli"/>
+        <a:font script="Deva" typeface="Mangal"/>
+        <a:font script="Telu" typeface="Gautami"/>
+        <a:font script="Taml" typeface="Latha"/>
+        <a:font script="Syrc" typeface="Estrangelo Edessa"/>
+        <a:font script="Orya" typeface="Kalinga"/>
+        <a:font script="Mlym" typeface="Kartika"/>
+        <a:font script="Laoo" typeface="DokChampa"/>
+        <a:font script="Sinh" typeface="Iskoola Pota"/>
+        <a:font script="Mong" typeface="Mongolian Baiti"/>
+        <a:font script="Viet" typeface="Times New Roman"/>
+        <a:font script="Uigh" typeface="Microsoft Uighur"/>
+        <a:font script="Geor" typeface="Sylfaen"/>
+        <a:font script="Armn" typeface="Arial"/>
+        <a:font script="Bugi" typeface="Leelawadee UI"/>
+        <a:font script="Bopo" typeface="Microsoft JhengHei"/>
+        <a:font script="Java" typeface="Javanese Text"/>
+        <a:font script="Lisu" typeface="Segoe UI"/>
+        <a:font script="Mymr" typeface="Myanmar Text"/>
+        <a:font script="Nkoo" typeface="Ebrima"/>
+        <a:font script="Olck" typeface="Nirmala UI"/>
+        <a:font script="Osma" typeface="Ebrima"/>
+        <a:font script="Phag" typeface="Phagspa"/>
+        <a:font script="Syrn" typeface="Estrangelo Edessa"/>
+        <a:font script="Syrj" typeface="Estrangelo Edessa"/>
+        <a:font script="Syre" typeface="Estrangelo Edessa"/>
+        <a:font script="Sora" typeface="Nirmala UI"/>
+        <a:font script="Tale" typeface="Microsoft Tai Le"/>
+        <a:font script="Talu" typeface="Microsoft New Tai Lue"/>
+        <a:font script="Tfng" typeface="Ebrima"/>
+      </a:majorFont>
+      <a:minorFont>
+        <a:latin typeface="Aptos" panose="02110004020202020204"/>
+        <a:ea typeface=""/>
+        <a:cs typeface=""/>
+        <a:font script="Jpan" typeface="游ゴシック"/>
+        <a:font script="Hang" typeface="맑은 고딕"/>
+        <a:font script="Hans" typeface="等线"/>
+        <a:font script="Hant" typeface="新細明體"/>
+        <a:font script="Arab" typeface="Arial"/>
+        <a:font script="Hebr" typeface="Arial"/>
+        <a:font script="Thai" typeface="Cordia New"/>
+        <a:font script="Ethi" typeface="Nyala"/>
+        <a:font script="Beng" typeface="Vrinda"/>
+        <a:font script="Gujr" typeface="Shruti"/>
+        <a:font script="Khmr" typeface="DaunPenh"/>
+        <a:font script="Knda" typeface="Tunga"/>
+        <a:font script="Guru" typeface="Raavi"/>
+        <a:font script="Cans" typeface="Euphemia"/>
+        <a:font script="Cher" typeface="Plantagenet Cherokee"/>
+        <a:font script="Yiii" typeface="Microsoft Yi Baiti"/>
+        <a:font script="Tibt" typeface="Microsoft Himalaya"/>
+        <a:font script="Thaa" typeface="MV Boli"/>
+        <a:font script="Deva" typeface="Mangal"/>
+        <a:font script="Telu" typeface="Gautami"/>
+        <a:font script="Taml" typeface="Latha"/>
+        <a:font script="Syrc" typeface="Estrangelo Edessa"/>
+        <a:font script="Orya" typeface="Kalinga"/>
+        <a:font script="Mlym" typeface="Kartika"/>
+        <a:font script="Laoo" typeface="DokChampa"/>
+        <a:font script="Sinh" typeface="Iskoola Pota"/>
+        <a:font script="Mong" typeface="Mongolian Baiti"/>
+        <a:font script="Viet" typeface="Arial"/>
+        <a:font script="Uigh" typeface="Microsoft Uighur"/>
+        <a:font script="Geor" typeface="Sylfaen"/>
+        <a:font script="Armn" typeface="Arial"/>
+        <a:font script="Bugi" typeface="Leelawadee UI"/>
+        <a:font script="Bopo" typeface="Microsoft JhengHei"/>
+        <a:font script="Java" typeface="Javanese Text"/>
+        <a:font script="Lisu" typeface="Segoe UI"/>
+        <a:font script="Mymr" typeface="Myanmar Text"/>
+        <a:font script="Nkoo" typeface="Ebrima"/>
+        <a:font script="Olck" typeface="Nirmala UI"/>
+        <a:font script="Osma" typeface="Ebrima"/>
+        <a:font script="Phag" typeface="Phagspa"/>
+        <a:font script="Syrn" typeface="Estrangelo Edessa"/>
+        <a:font script="Syrj" typeface="Estrangelo Edessa"/>
+        <a:font script="Syre" typeface="Estrangelo Edessa"/>
+        <a:font script="Sora" typeface="Nirmala UI"/>
+        <a:font script="Tale" typeface="Microsoft Tai Le"/>
+        <a:font script="Talu" typeface="Microsoft New Tai Lue"/>
+        <a:font script="Tfng" typeface="Ebrima"/>
+      </a:minorFont>
+    </a:fontScheme>
+    <a:fmtScheme name="Office">
+      <a:fillStyleLst>
+        <a:solidFill>
+          <a:schemeClr val="phClr"/>
+        </a:solidFill>
+        <a:gradFill rotWithShape="1">
+          <a:gsLst>
+            <a:gs pos="0">
+              <a:schemeClr val="phClr">
+                <a:lumMod val="110000"/>
+                <a:satMod val="105000"/>
+                <a:tint val="67000"/>
+              </a:schemeClr>
+            </a:gs>
+            <a:gs pos="50000">
+              <a:schemeClr val="phClr">
+                <a:lumMod val="105000"/>
+                <a:satMod val="103000"/>
+                <a:tint val="73000"/>
+              </a:schemeClr>
+            </a:gs>
+            <a:gs pos="100000">
+              <a:schemeClr val="phClr">
+                <a:lumMod val="105000"/>
+                <a:satMod val="109000"/>
+                <a:tint val="81000"/>
+              </a:schemeClr>
+            </a:gs>
+          </a:gsLst>
+          <a:lin ang="5400000" scaled="0"/>
+        </a:gradFill>
+        <a:gradFill rotWithShape="1">
+          <a:gsLst>
+            <a:gs pos="0">
+              <a:schemeClr val="phClr">
+                <a:satMod val="103000"/>
+                <a:lumMod val="102000"/>
+                <a:tint val="94000"/>
+              </a:schemeClr>
+            </a:gs>
+            <a:gs pos="50000">
+              <a:schemeClr val="phClr">
+                <a:satMod val="110000"/>
+                <a:lumMod val="100000"/>
+                <a:shade val="100000"/>
+              </a:schemeClr>
+            </a:gs>
+            <a:gs pos="100000">
+              <a:schemeClr val="phClr">
+                <a:lumMod val="99000"/>
+                <a:satMod val="120000"/>
+                <a:shade val="78000"/>
+              </a:schemeClr>
+            </a:gs>
+          </a:gsLst>
+          <a:lin ang="5400000" scaled="0"/>
+        </a:gradFill>
+      </a:fillStyleLst>
+      <a:lnStyleLst>
+        <a:ln w="12700" cap="flat" cmpd="sng" algn="ctr">
+          <a:solidFill>
+            <a:schemeClr val="phClr"/>
+          </a:solidFill>
+          <a:prstDash val="solid"/>
+          <a:miter lim="800000"/>
+        </a:ln>
+        <a:ln w="19050" cap="flat" cmpd="sng" algn="ctr">
+          <a:solidFill>
+            <a:schemeClr val="phClr"/>
+          </a:solidFill>
+          <a:prstDash val="solid"/>
+          <a:miter lim="800000"/>
+        </a:ln>
+        <a:ln w="25400" cap="flat" cmpd="sng" algn="ctr">
+          <a:solidFill>
+            <a:schemeClr val="phClr"/>
+          </a:solidFill>
+          <a:prstDash val="solid"/>
+          <a:miter lim="800000"/>
+        </a:ln>
+      </a:lnStyleLst>
+      <a:effectStyleLst>
+        <a:effectStyle>
+          <a:effectLst/>
+        </a:effectStyle>
+        <a:effectStyle>
+          <a:effectLst/>
+        </a:effectStyle>
+        <a:effectStyle>
+          <a:effectLst>
+            <a:outerShdw blurRad="57150" dist="19050" dir="5400000" algn="ctr" rotWithShape="0">
+              <a:srgbClr val="000000">
+                <a:alpha val="63000"/>
+              </a:srgbClr>
+            </a:outerShdw>
+          </a:effectLst>
+        </a:effectStyle>
+      </a:effectStyleLst>
+      <a:bgFillStyleLst>
+        <a:solidFill>
+          <a:schemeClr val="phClr"/>
+        </a:solidFill>
+        <a:solidFill>
+          <a:schemeClr val="phClr">
+            <a:tint val="95000"/>
+            <a:satMod val="170000"/>
+          </a:schemeClr>
+        </a:solidFill>
+        <a:gradFill rotWithShape="1">
+          <a:gsLst>
+            <a:gs pos="0">
+              <a:schemeClr val="phClr">
+                <a:tint val="93000"/>
+                <a:satMod val="150000"/>
+                <a:shade val="98000"/>
+                <a:lumMod val="102000"/>
+              </a:schemeClr>
+            </a:gs>
+            <a:gs pos="50000">
+              <a:schemeClr val="phClr">
+                <a:tint val="98000"/>
+                <a:satMod val="130000"/>
+                <a:shade val="90000"/>
+                <a:lumMod val="103000"/>
+              </a:schemeClr>
+            </a:gs>
+            <a:gs pos="100000">
+              <a:schemeClr val="phClr">
+                <a:shade val="63000"/>
+                <a:satMod val="120000"/>
+              </a:schemeClr>
+            </a:gs>
+          </a:gsLst>
+          <a:lin ang="5400000" scaled="0"/>
+        </a:gradFill>
+      </a:bgFillStyleLst>
+    </a:fmtScheme>
+  </a:themeElements>
+  <a:objectDefaults>
+    <a:lnDef>
+      <a:spPr/>
+      <a:bodyPr/>
+      <a:lstStyle/>
+      <a:style>
+        <a:lnRef idx="2">
+          <a:schemeClr val="accent1"/>
+        </a:lnRef>
+        <a:fillRef idx="0">
+          <a:schemeClr val="accent1"/>
+        </a:fillRef>
+        <a:effectRef idx="1">
+          <a:schemeClr val="accent1"/>
+        </a:effectRef>
+        <a:fontRef idx="minor">
+          <a:schemeClr val="tx1"/>
+        </a:fontRef>
+      </a:style>
+    </a:lnDef>
+  </a:objectDefaults>
+  <a:extraClrSchemeLst/>
+  <a:extLst>
+    <a:ext uri="{05A4C25C-085E-4340-85A3-A5531E510DB2}">
+      <thm15:themeFamily xmlns:thm15="http://schemas.microsoft.com/office/thememl/2012/main" name="Office Theme" id="{2E142A2C-CD16-42D6-873A-C26D2A0506FA}" vid="{1BDDFF52-6CD6-40A5-AB3C-68EB2F1E4D0A}"/>
+    </a:ext>
+  </a:extLst>
+</a:theme>
 </file>